--- a/output_pptx/The_Solid_Rock.pptx
+++ b/output_pptx/The_Solid_Rock.pptx
@@ -3121,23 +3121,23 @@
         </p:nvSpPr>
         <p:spPr>
           <a:xfrm>
-            <a:off x="594360" y="2258568"/>
-            <a:ext cx="11002975" cy="685800"/>
-          </a:xfrm>
-          <a:prstGeom prst="rect">
-            <a:avLst/>
-          </a:prstGeom>
-          <a:noFill/>
-        </p:spPr>
-        <p:txBody>
-          <a:bodyPr wrap="square">
-            <a:spAutoFit/>
-          </a:bodyPr>
-          <a:lstStyle/>
-          <a:p>
-            <a:pPr algn="ctr"/>
-            <a:r>
-              <a:rPr sz="4400" b="1" i="0">
+            <a:off x="640080" y="2052828"/>
+            <a:ext cx="10911535" cy="731520"/>
+          </a:xfrm>
+          <a:prstGeom prst="rect">
+            <a:avLst/>
+          </a:prstGeom>
+          <a:noFill/>
+        </p:spPr>
+        <p:txBody>
+          <a:bodyPr wrap="square">
+            <a:spAutoFit/>
+          </a:bodyPr>
+          <a:lstStyle/>
+          <a:p>
+            <a:pPr algn="ctr"/>
+            <a:r>
+              <a:rPr sz="4800" b="1" i="0">
                 <a:solidFill>
                   <a:srgbClr val="FFFFFF"/>
                 </a:solidFill>
@@ -3156,25 +3156,60 @@
         </p:nvSpPr>
         <p:spPr>
           <a:xfrm>
-            <a:off x="594360" y="2980944"/>
-            <a:ext cx="11002975" cy="347472"/>
-          </a:xfrm>
-          <a:prstGeom prst="rect">
-            <a:avLst/>
-          </a:prstGeom>
-          <a:noFill/>
-        </p:spPr>
-        <p:txBody>
-          <a:bodyPr wrap="square">
-            <a:spAutoFit/>
-          </a:bodyPr>
-          <a:lstStyle/>
-          <a:p>
-            <a:pPr algn="ctr"/>
-            <a:r>
-              <a:rPr sz="2200" b="0" i="1">
-                <a:solidFill>
-                  <a:srgbClr val="8C8C8C"/>
+            <a:off x="640080" y="2985516"/>
+            <a:ext cx="10911535" cy="731520"/>
+          </a:xfrm>
+          <a:prstGeom prst="rect">
+            <a:avLst/>
+          </a:prstGeom>
+          <a:noFill/>
+        </p:spPr>
+        <p:txBody>
+          <a:bodyPr wrap="square">
+            <a:spAutoFit/>
+          </a:bodyPr>
+          <a:lstStyle/>
+          <a:p>
+            <a:pPr algn="ctr"/>
+            <a:r>
+              <a:rPr sz="4800" b="1" i="0">
+                <a:solidFill>
+                  <a:srgbClr val="FFFFFF"/>
+                </a:solidFill>
+                <a:latin typeface="Arial"/>
+              </a:rPr>
+              <a:t>Minha esperança está firme em Ti</a:t>
+            </a:r>
+          </a:p>
+        </p:txBody>
+      </p:sp>
+      <p:sp>
+        <p:nvSpPr>
+          <p:cNvPr id="4" name="TextBox 3"/>
+          <p:cNvSpPr txBox="1"/>
+          <p:nvPr/>
+        </p:nvSpPr>
+        <p:spPr>
+          <a:xfrm>
+            <a:off x="640080" y="4128516"/>
+            <a:ext cx="10911535" cy="310896"/>
+          </a:xfrm>
+          <a:prstGeom prst="rect">
+            <a:avLst/>
+          </a:prstGeom>
+          <a:noFill/>
+        </p:spPr>
+        <p:txBody>
+          <a:bodyPr wrap="square">
+            <a:spAutoFit/>
+          </a:bodyPr>
+          <a:lstStyle/>
+          <a:p>
+            <a:pPr algn="ctr"/>
+            <a:r>
+              <a:rPr sz="2000" b="0" i="0">
+                <a:solidFill>
+                  <a:srgbClr val="828282"/>
                 </a:solidFill>
                 <a:latin typeface="Arial"/>
               </a:rPr>
@@ -3185,66 +3220,31 @@
       </p:sp>
       <p:sp>
         <p:nvSpPr>
-          <p:cNvPr id="4" name="TextBox 3"/>
-          <p:cNvSpPr txBox="1"/>
-          <p:nvPr/>
-        </p:nvSpPr>
-        <p:spPr>
-          <a:xfrm>
-            <a:off x="594360" y="3529584"/>
-            <a:ext cx="11002975" cy="685800"/>
-          </a:xfrm>
-          <a:prstGeom prst="rect">
-            <a:avLst/>
-          </a:prstGeom>
-          <a:noFill/>
-        </p:spPr>
-        <p:txBody>
-          <a:bodyPr wrap="square">
-            <a:spAutoFit/>
-          </a:bodyPr>
-          <a:lstStyle/>
-          <a:p>
-            <a:pPr algn="ctr"/>
-            <a:r>
-              <a:rPr sz="4400" b="1" i="0">
-                <a:solidFill>
-                  <a:srgbClr val="FFFFFF"/>
-                </a:solidFill>
-                <a:latin typeface="Arial"/>
-              </a:rPr>
-              <a:t>Minha esperança está firme em Ti</a:t>
-            </a:r>
-          </a:p>
-        </p:txBody>
-      </p:sp>
-      <p:sp>
-        <p:nvSpPr>
           <p:cNvPr id="5" name="TextBox 4"/>
           <p:cNvSpPr txBox="1"/>
           <p:nvPr/>
         </p:nvSpPr>
         <p:spPr>
           <a:xfrm>
-            <a:off x="594360" y="4251960"/>
-            <a:ext cx="11002975" cy="347472"/>
-          </a:xfrm>
-          <a:prstGeom prst="rect">
-            <a:avLst/>
-          </a:prstGeom>
-          <a:noFill/>
-        </p:spPr>
-        <p:txBody>
-          <a:bodyPr wrap="square">
-            <a:spAutoFit/>
-          </a:bodyPr>
-          <a:lstStyle/>
-          <a:p>
-            <a:pPr algn="ctr"/>
-            <a:r>
-              <a:rPr sz="2200" b="0" i="1">
-                <a:solidFill>
-                  <a:srgbClr val="8C8C8C"/>
+            <a:off x="640080" y="4494276"/>
+            <a:ext cx="10911535" cy="310896"/>
+          </a:xfrm>
+          <a:prstGeom prst="rect">
+            <a:avLst/>
+          </a:prstGeom>
+          <a:noFill/>
+        </p:spPr>
+        <p:txBody>
+          <a:bodyPr wrap="square">
+            <a:spAutoFit/>
+          </a:bodyPr>
+          <a:lstStyle/>
+          <a:p>
+            <a:pPr algn="ctr"/>
+            <a:r>
+              <a:rPr sz="2000" b="0" i="0">
+                <a:solidFill>
+                  <a:srgbClr val="828282"/>
                 </a:solidFill>
                 <a:latin typeface="Arial"/>
               </a:rPr>
@@ -3287,23 +3287,23 @@
         </p:nvSpPr>
         <p:spPr>
           <a:xfrm>
-            <a:off x="594360" y="1837944"/>
-            <a:ext cx="11002975" cy="685800"/>
-          </a:xfrm>
-          <a:prstGeom prst="rect">
-            <a:avLst/>
-          </a:prstGeom>
-          <a:noFill/>
-        </p:spPr>
-        <p:txBody>
-          <a:bodyPr wrap="square">
-            <a:spAutoFit/>
-          </a:bodyPr>
-          <a:lstStyle/>
-          <a:p>
-            <a:pPr algn="ctr"/>
-            <a:r>
-              <a:rPr sz="4400" b="1" i="0">
+            <a:off x="640080" y="1650492"/>
+            <a:ext cx="10911535" cy="731520"/>
+          </a:xfrm>
+          <a:prstGeom prst="rect">
+            <a:avLst/>
+          </a:prstGeom>
+          <a:noFill/>
+        </p:spPr>
+        <p:txBody>
+          <a:bodyPr wrap="square">
+            <a:spAutoFit/>
+          </a:bodyPr>
+          <a:lstStyle/>
+          <a:p>
+            <a:pPr algn="ctr"/>
+            <a:r>
+              <a:rPr sz="4800" b="1" i="0">
                 <a:solidFill>
                   <a:srgbClr val="FFFFFF"/>
                 </a:solidFill>
@@ -3322,8 +3322,8 @@
         </p:nvSpPr>
         <p:spPr>
           <a:xfrm>
-            <a:off x="594360" y="2560320"/>
-            <a:ext cx="11002975" cy="384048"/>
+            <a:off x="640080" y="2418588"/>
+            <a:ext cx="10911535" cy="365760"/>
           </a:xfrm>
           <a:prstGeom prst="rect">
             <a:avLst/>
@@ -3340,7 +3340,7 @@
             <a:r>
               <a:rPr sz="2400" b="0" i="1">
                 <a:solidFill>
-                  <a:srgbClr val="B4B4B4"/>
+                  <a:srgbClr val="AAAAAA"/>
                 </a:solidFill>
                 <a:latin typeface="Arial"/>
               </a:rPr>
@@ -3357,8 +3357,78 @@
         </p:nvSpPr>
         <p:spPr>
           <a:xfrm>
-            <a:off x="594360" y="2980944"/>
-            <a:ext cx="11002975" cy="347472"/>
+            <a:off x="640080" y="2985516"/>
+            <a:ext cx="10911535" cy="731520"/>
+          </a:xfrm>
+          <a:prstGeom prst="rect">
+            <a:avLst/>
+          </a:prstGeom>
+          <a:noFill/>
+        </p:spPr>
+        <p:txBody>
+          <a:bodyPr wrap="square">
+            <a:spAutoFit/>
+          </a:bodyPr>
+          <a:lstStyle/>
+          <a:p>
+            <a:pPr algn="ctr"/>
+            <a:r>
+              <a:rPr sz="4800" b="1" i="0">
+                <a:solidFill>
+                  <a:srgbClr val="FFFFFF"/>
+                </a:solidFill>
+                <a:latin typeface="Arial"/>
+              </a:rPr>
+              <a:t>揺るがぬいしずえ</a:t>
+            </a:r>
+          </a:p>
+        </p:txBody>
+      </p:sp>
+      <p:sp>
+        <p:nvSpPr>
+          <p:cNvPr id="5" name="TextBox 4"/>
+          <p:cNvSpPr txBox="1"/>
+          <p:nvPr/>
+        </p:nvSpPr>
+        <p:spPr>
+          <a:xfrm>
+            <a:off x="640080" y="3753612"/>
+            <a:ext cx="10911535" cy="365760"/>
+          </a:xfrm>
+          <a:prstGeom prst="rect">
+            <a:avLst/>
+          </a:prstGeom>
+          <a:noFill/>
+        </p:spPr>
+        <p:txBody>
+          <a:bodyPr wrap="square">
+            <a:spAutoFit/>
+          </a:bodyPr>
+          <a:lstStyle/>
+          <a:p>
+            <a:pPr algn="ctr"/>
+            <a:r>
+              <a:rPr sz="2400" b="0" i="1">
+                <a:solidFill>
+                  <a:srgbClr val="AAAAAA"/>
+                </a:solidFill>
+                <a:latin typeface="Arial"/>
+              </a:rPr>
+              <a:t>yuru ga nuishizue</a:t>
+            </a:r>
+          </a:p>
+        </p:txBody>
+      </p:sp>
+      <p:sp>
+        <p:nvSpPr>
+          <p:cNvPr id="6" name="TextBox 5"/>
+          <p:cNvSpPr txBox="1"/>
+          <p:nvPr/>
+        </p:nvSpPr>
+        <p:spPr>
+          <a:xfrm>
+            <a:off x="640080" y="4530852"/>
+            <a:ext cx="10911535" cy="310896"/>
           </a:xfrm>
           <a:prstGeom prst="rect">
             <a:avLst/>
@@ -3375,7 +3445,7 @@
             <a:r>
               <a:rPr sz="2000" b="0" i="1">
                 <a:solidFill>
-                  <a:srgbClr val="8C8C8C"/>
+                  <a:srgbClr val="828282"/>
                 </a:solidFill>
                 <a:latin typeface="Arial"/>
               </a:rPr>
@@ -3386,84 +3456,14 @@
       </p:sp>
       <p:sp>
         <p:nvSpPr>
-          <p:cNvPr id="5" name="TextBox 4"/>
-          <p:cNvSpPr txBox="1"/>
-          <p:nvPr/>
-        </p:nvSpPr>
-        <p:spPr>
-          <a:xfrm>
-            <a:off x="594360" y="3529584"/>
-            <a:ext cx="11002975" cy="685800"/>
-          </a:xfrm>
-          <a:prstGeom prst="rect">
-            <a:avLst/>
-          </a:prstGeom>
-          <a:noFill/>
-        </p:spPr>
-        <p:txBody>
-          <a:bodyPr wrap="square">
-            <a:spAutoFit/>
-          </a:bodyPr>
-          <a:lstStyle/>
-          <a:p>
-            <a:pPr algn="ctr"/>
-            <a:r>
-              <a:rPr sz="4400" b="1" i="0">
-                <a:solidFill>
-                  <a:srgbClr val="FFFFFF"/>
-                </a:solidFill>
-                <a:latin typeface="Arial"/>
-              </a:rPr>
-              <a:t>揺るがぬいしずえ</a:t>
-            </a:r>
-          </a:p>
-        </p:txBody>
-      </p:sp>
-      <p:sp>
-        <p:nvSpPr>
-          <p:cNvPr id="6" name="TextBox 5"/>
-          <p:cNvSpPr txBox="1"/>
-          <p:nvPr/>
-        </p:nvSpPr>
-        <p:spPr>
-          <a:xfrm>
-            <a:off x="594360" y="4251960"/>
-            <a:ext cx="11002975" cy="384048"/>
-          </a:xfrm>
-          <a:prstGeom prst="rect">
-            <a:avLst/>
-          </a:prstGeom>
-          <a:noFill/>
-        </p:spPr>
-        <p:txBody>
-          <a:bodyPr wrap="square">
-            <a:spAutoFit/>
-          </a:bodyPr>
-          <a:lstStyle/>
-          <a:p>
-            <a:pPr algn="ctr"/>
-            <a:r>
-              <a:rPr sz="2400" b="0" i="1">
-                <a:solidFill>
-                  <a:srgbClr val="B4B4B4"/>
-                </a:solidFill>
-                <a:latin typeface="Arial"/>
-              </a:rPr>
-              <a:t>yuru ga nuishizue</a:t>
-            </a:r>
-          </a:p>
-        </p:txBody>
-      </p:sp>
-      <p:sp>
-        <p:nvSpPr>
           <p:cNvPr id="7" name="TextBox 6"/>
           <p:cNvSpPr txBox="1"/>
           <p:nvPr/>
         </p:nvSpPr>
         <p:spPr>
           <a:xfrm>
-            <a:off x="594360" y="4672584"/>
-            <a:ext cx="11002975" cy="347472"/>
+            <a:off x="640080" y="4896612"/>
+            <a:ext cx="10911535" cy="310896"/>
           </a:xfrm>
           <a:prstGeom prst="rect">
             <a:avLst/>
@@ -3480,7 +3480,7 @@
             <a:r>
               <a:rPr sz="2000" b="0" i="1">
                 <a:solidFill>
-                  <a:srgbClr val="8C8C8C"/>
+                  <a:srgbClr val="828282"/>
                 </a:solidFill>
                 <a:latin typeface="Arial"/>
               </a:rPr>
@@ -3523,23 +3523,23 @@
         </p:nvSpPr>
         <p:spPr>
           <a:xfrm>
-            <a:off x="594360" y="2258568"/>
-            <a:ext cx="11002975" cy="685800"/>
-          </a:xfrm>
-          <a:prstGeom prst="rect">
-            <a:avLst/>
-          </a:prstGeom>
-          <a:noFill/>
-        </p:spPr>
-        <p:txBody>
-          <a:bodyPr wrap="square">
-            <a:spAutoFit/>
-          </a:bodyPr>
-          <a:lstStyle/>
-          <a:p>
-            <a:pPr algn="ctr"/>
-            <a:r>
-              <a:rPr sz="4400" b="1" i="0">
+            <a:off x="640080" y="2052828"/>
+            <a:ext cx="10911535" cy="731520"/>
+          </a:xfrm>
+          <a:prstGeom prst="rect">
+            <a:avLst/>
+          </a:prstGeom>
+          <a:noFill/>
+        </p:spPr>
+        <p:txBody>
+          <a:bodyPr wrap="square">
+            <a:spAutoFit/>
+          </a:bodyPr>
+          <a:lstStyle/>
+          <a:p>
+            <a:pPr algn="ctr"/>
+            <a:r>
+              <a:rPr sz="4800" b="1" i="0">
                 <a:solidFill>
                   <a:srgbClr val="FFFFFF"/>
                 </a:solidFill>
@@ -3558,29 +3558,29 @@
         </p:nvSpPr>
         <p:spPr>
           <a:xfrm>
-            <a:off x="594360" y="2980944"/>
-            <a:ext cx="11002975" cy="347472"/>
-          </a:xfrm>
-          <a:prstGeom prst="rect">
-            <a:avLst/>
-          </a:prstGeom>
-          <a:noFill/>
-        </p:spPr>
-        <p:txBody>
-          <a:bodyPr wrap="square">
-            <a:spAutoFit/>
-          </a:bodyPr>
-          <a:lstStyle/>
-          <a:p>
-            <a:pPr algn="ctr"/>
-            <a:r>
-              <a:rPr sz="2200" b="0" i="1">
-                <a:solidFill>
-                  <a:srgbClr val="8C8C8C"/>
-                </a:solidFill>
-                <a:latin typeface="Arial"/>
-              </a:rPr>
-              <a:t/>
+            <a:off x="640080" y="2985516"/>
+            <a:ext cx="10911535" cy="731520"/>
+          </a:xfrm>
+          <a:prstGeom prst="rect">
+            <a:avLst/>
+          </a:prstGeom>
+          <a:noFill/>
+        </p:spPr>
+        <p:txBody>
+          <a:bodyPr wrap="square">
+            <a:spAutoFit/>
+          </a:bodyPr>
+          <a:lstStyle/>
+          <a:p>
+            <a:pPr algn="ctr"/>
+            <a:r>
+              <a:rPr sz="3600" b="1" i="0">
+                <a:solidFill>
+                  <a:srgbClr val="FFFFFF"/>
+                </a:solidFill>
+                <a:latin typeface="Arial"/>
+              </a:rPr>
+              <a:t>Quando as trevas parecem ocultar Seu rosto</a:t>
             </a:r>
           </a:p>
         </p:txBody>
@@ -3593,29 +3593,29 @@
         </p:nvSpPr>
         <p:spPr>
           <a:xfrm>
-            <a:off x="594360" y="3529584"/>
-            <a:ext cx="11002975" cy="685800"/>
-          </a:xfrm>
-          <a:prstGeom prst="rect">
-            <a:avLst/>
-          </a:prstGeom>
-          <a:noFill/>
-        </p:spPr>
-        <p:txBody>
-          <a:bodyPr wrap="square">
-            <a:spAutoFit/>
-          </a:bodyPr>
-          <a:lstStyle/>
-          <a:p>
-            <a:pPr algn="ctr"/>
-            <a:r>
-              <a:rPr sz="3352" b="1" i="0">
-                <a:solidFill>
-                  <a:srgbClr val="FFFFFF"/>
-                </a:solidFill>
-                <a:latin typeface="Arial"/>
-              </a:rPr>
-              <a:t>Quando as trevas parecem ocultar Seu rosto</a:t>
+            <a:off x="640080" y="4128516"/>
+            <a:ext cx="10911535" cy="310896"/>
+          </a:xfrm>
+          <a:prstGeom prst="rect">
+            <a:avLst/>
+          </a:prstGeom>
+          <a:noFill/>
+        </p:spPr>
+        <p:txBody>
+          <a:bodyPr wrap="square">
+            <a:spAutoFit/>
+          </a:bodyPr>
+          <a:lstStyle/>
+          <a:p>
+            <a:pPr algn="ctr"/>
+            <a:r>
+              <a:rPr sz="2000" b="0" i="0">
+                <a:solidFill>
+                  <a:srgbClr val="828282"/>
+                </a:solidFill>
+                <a:latin typeface="Arial"/>
+              </a:rPr>
+              <a:t>主の血と約束　         私を支える</a:t>
             </a:r>
           </a:p>
         </p:txBody>
@@ -3628,29 +3628,29 @@
         </p:nvSpPr>
         <p:spPr>
           <a:xfrm>
-            <a:off x="594360" y="4251960"/>
-            <a:ext cx="11002975" cy="347472"/>
-          </a:xfrm>
-          <a:prstGeom prst="rect">
-            <a:avLst/>
-          </a:prstGeom>
-          <a:noFill/>
-        </p:spPr>
-        <p:txBody>
-          <a:bodyPr wrap="square">
-            <a:spAutoFit/>
-          </a:bodyPr>
-          <a:lstStyle/>
-          <a:p>
-            <a:pPr algn="ctr"/>
-            <a:r>
-              <a:rPr sz="2200" b="0" i="1">
-                <a:solidFill>
-                  <a:srgbClr val="8C8C8C"/>
-                </a:solidFill>
-                <a:latin typeface="Arial"/>
-              </a:rPr>
-              <a:t/>
+            <a:off x="640080" y="4494276"/>
+            <a:ext cx="10911535" cy="310896"/>
+          </a:xfrm>
+          <a:prstGeom prst="rect">
+            <a:avLst/>
+          </a:prstGeom>
+          <a:noFill/>
+        </p:spPr>
+        <p:txBody>
+          <a:bodyPr wrap="square">
+            <a:spAutoFit/>
+          </a:bodyPr>
+          <a:lstStyle/>
+          <a:p>
+            <a:pPr algn="ctr"/>
+            <a:r>
+              <a:rPr sz="2000" b="0" i="0">
+                <a:solidFill>
+                  <a:srgbClr val="828282"/>
+                </a:solidFill>
+                <a:latin typeface="Arial"/>
+              </a:rPr>
+              <a:t>大水の中にも　          望みは絶えない</a:t>
             </a:r>
           </a:p>
         </p:txBody>
@@ -3689,23 +3689,23 @@
         </p:nvSpPr>
         <p:spPr>
           <a:xfrm>
-            <a:off x="594360" y="2258568"/>
-            <a:ext cx="11002975" cy="685800"/>
-          </a:xfrm>
-          <a:prstGeom prst="rect">
-            <a:avLst/>
-          </a:prstGeom>
-          <a:noFill/>
-        </p:spPr>
-        <p:txBody>
-          <a:bodyPr wrap="square">
-            <a:spAutoFit/>
-          </a:bodyPr>
-          <a:lstStyle/>
-          <a:p>
-            <a:pPr algn="ctr"/>
-            <a:r>
-              <a:rPr sz="4266" b="1" i="0">
+            <a:off x="640080" y="2052828"/>
+            <a:ext cx="10911535" cy="731520"/>
+          </a:xfrm>
+          <a:prstGeom prst="rect">
+            <a:avLst/>
+          </a:prstGeom>
+          <a:noFill/>
+        </p:spPr>
+        <p:txBody>
+          <a:bodyPr wrap="square">
+            <a:spAutoFit/>
+          </a:bodyPr>
+          <a:lstStyle/>
+          <a:p>
+            <a:pPr algn="ctr"/>
+            <a:r>
+              <a:rPr sz="4600" b="1" i="0">
                 <a:solidFill>
                   <a:srgbClr val="FFFFFF"/>
                 </a:solidFill>
@@ -3724,99 +3724,29 @@
         </p:nvSpPr>
         <p:spPr>
           <a:xfrm>
-            <a:off x="594360" y="2980944"/>
-            <a:ext cx="11002975" cy="347472"/>
-          </a:xfrm>
-          <a:prstGeom prst="rect">
-            <a:avLst/>
-          </a:prstGeom>
-          <a:noFill/>
-        </p:spPr>
-        <p:txBody>
-          <a:bodyPr wrap="square">
-            <a:spAutoFit/>
-          </a:bodyPr>
-          <a:lstStyle/>
-          <a:p>
-            <a:pPr algn="ctr"/>
-            <a:r>
-              <a:rPr sz="2200" b="0" i="1">
-                <a:solidFill>
-                  <a:srgbClr val="8C8C8C"/>
-                </a:solidFill>
-                <a:latin typeface="Arial"/>
-              </a:rPr>
-              <a:t/>
-            </a:r>
-          </a:p>
-        </p:txBody>
-      </p:sp>
-      <p:sp>
-        <p:nvSpPr>
-          <p:cNvPr id="4" name="TextBox 3"/>
-          <p:cNvSpPr txBox="1"/>
-          <p:nvPr/>
-        </p:nvSpPr>
-        <p:spPr>
-          <a:xfrm>
-            <a:off x="594360" y="3529584"/>
-            <a:ext cx="11002975" cy="685800"/>
-          </a:xfrm>
-          <a:prstGeom prst="rect">
-            <a:avLst/>
-          </a:prstGeom>
-          <a:noFill/>
-        </p:spPr>
-        <p:txBody>
-          <a:bodyPr wrap="square">
-            <a:spAutoFit/>
-          </a:bodyPr>
-          <a:lstStyle/>
-          <a:p>
-            <a:pPr algn="ctr"/>
-            <a:r>
-              <a:rPr sz="3911" b="1" i="0">
+            <a:off x="640080" y="2985516"/>
+            <a:ext cx="10911535" cy="731520"/>
+          </a:xfrm>
+          <a:prstGeom prst="rect">
+            <a:avLst/>
+          </a:prstGeom>
+          <a:noFill/>
+        </p:spPr>
+        <p:txBody>
+          <a:bodyPr wrap="square">
+            <a:spAutoFit/>
+          </a:bodyPr>
+          <a:lstStyle/>
+          <a:p>
+            <a:pPr algn="ctr"/>
+            <a:r>
+              <a:rPr sz="4200" b="1" i="0">
                 <a:solidFill>
                   <a:srgbClr val="FFFFFF"/>
                 </a:solidFill>
                 <a:latin typeface="Arial"/>
               </a:rPr>
               <a:t>Em meio às mais furiosas tempestades</a:t>
-            </a:r>
-          </a:p>
-        </p:txBody>
-      </p:sp>
-      <p:sp>
-        <p:nvSpPr>
-          <p:cNvPr id="5" name="TextBox 4"/>
-          <p:cNvSpPr txBox="1"/>
-          <p:nvPr/>
-        </p:nvSpPr>
-        <p:spPr>
-          <a:xfrm>
-            <a:off x="594360" y="4251960"/>
-            <a:ext cx="11002975" cy="347472"/>
-          </a:xfrm>
-          <a:prstGeom prst="rect">
-            <a:avLst/>
-          </a:prstGeom>
-          <a:noFill/>
-        </p:spPr>
-        <p:txBody>
-          <a:bodyPr wrap="square">
-            <a:spAutoFit/>
-          </a:bodyPr>
-          <a:lstStyle/>
-          <a:p>
-            <a:pPr algn="ctr"/>
-            <a:r>
-              <a:rPr sz="2200" b="0" i="1">
-                <a:solidFill>
-                  <a:srgbClr val="8C8C8C"/>
-                </a:solidFill>
-                <a:latin typeface="Arial"/>
-              </a:rPr>
-              <a:t/>
             </a:r>
           </a:p>
         </p:txBody>
@@ -3855,23 +3785,23 @@
         </p:nvSpPr>
         <p:spPr>
           <a:xfrm>
-            <a:off x="594360" y="2258568"/>
-            <a:ext cx="11002975" cy="685800"/>
-          </a:xfrm>
-          <a:prstGeom prst="rect">
-            <a:avLst/>
-          </a:prstGeom>
-          <a:noFill/>
-        </p:spPr>
-        <p:txBody>
-          <a:bodyPr wrap="square">
-            <a:spAutoFit/>
-          </a:bodyPr>
-          <a:lstStyle/>
-          <a:p>
-            <a:pPr algn="ctr"/>
-            <a:r>
-              <a:rPr sz="4400" b="1" i="0">
+            <a:off x="640080" y="2052828"/>
+            <a:ext cx="10911535" cy="731520"/>
+          </a:xfrm>
+          <a:prstGeom prst="rect">
+            <a:avLst/>
+          </a:prstGeom>
+          <a:noFill/>
+        </p:spPr>
+        <p:txBody>
+          <a:bodyPr wrap="square">
+            <a:spAutoFit/>
+          </a:bodyPr>
+          <a:lstStyle/>
+          <a:p>
+            <a:pPr algn="ctr"/>
+            <a:r>
+              <a:rPr sz="4800" b="1" i="0">
                 <a:solidFill>
                   <a:srgbClr val="FFFFFF"/>
                 </a:solidFill>
@@ -3890,99 +3820,29 @@
         </p:nvSpPr>
         <p:spPr>
           <a:xfrm>
-            <a:off x="594360" y="2980944"/>
-            <a:ext cx="11002975" cy="347472"/>
-          </a:xfrm>
-          <a:prstGeom prst="rect">
-            <a:avLst/>
-          </a:prstGeom>
-          <a:noFill/>
-        </p:spPr>
-        <p:txBody>
-          <a:bodyPr wrap="square">
-            <a:spAutoFit/>
-          </a:bodyPr>
-          <a:lstStyle/>
-          <a:p>
-            <a:pPr algn="ctr"/>
-            <a:r>
-              <a:rPr sz="2200" b="0" i="1">
-                <a:solidFill>
-                  <a:srgbClr val="8C8C8C"/>
-                </a:solidFill>
-                <a:latin typeface="Arial"/>
-              </a:rPr>
-              <a:t/>
-            </a:r>
-          </a:p>
-        </p:txBody>
-      </p:sp>
-      <p:sp>
-        <p:nvSpPr>
-          <p:cNvPr id="4" name="TextBox 3"/>
-          <p:cNvSpPr txBox="1"/>
-          <p:nvPr/>
-        </p:nvSpPr>
-        <p:spPr>
-          <a:xfrm>
-            <a:off x="594360" y="3529584"/>
-            <a:ext cx="11002975" cy="685800"/>
-          </a:xfrm>
-          <a:prstGeom prst="rect">
-            <a:avLst/>
-          </a:prstGeom>
-          <a:noFill/>
-        </p:spPr>
-        <p:txBody>
-          <a:bodyPr wrap="square">
-            <a:spAutoFit/>
-          </a:bodyPr>
-          <a:lstStyle/>
-          <a:p>
-            <a:pPr algn="ctr"/>
-            <a:r>
-              <a:rPr sz="4400" b="1" i="0">
+            <a:off x="640080" y="2985516"/>
+            <a:ext cx="10911535" cy="731520"/>
+          </a:xfrm>
+          <a:prstGeom prst="rect">
+            <a:avLst/>
+          </a:prstGeom>
+          <a:noFill/>
+        </p:spPr>
+        <p:txBody>
+          <a:bodyPr wrap="square">
+            <a:spAutoFit/>
+          </a:bodyPr>
+          <a:lstStyle/>
+          <a:p>
+            <a:pPr algn="ctr"/>
+            <a:r>
+              <a:rPr sz="4800" b="1" i="0">
                 <a:solidFill>
                   <a:srgbClr val="FFFFFF"/>
                 </a:solidFill>
                 <a:latin typeface="Arial"/>
               </a:rPr>
               <a:t>Em Cristo, a Rocha firme, estou</a:t>
-            </a:r>
-          </a:p>
-        </p:txBody>
-      </p:sp>
-      <p:sp>
-        <p:nvSpPr>
-          <p:cNvPr id="5" name="TextBox 4"/>
-          <p:cNvSpPr txBox="1"/>
-          <p:nvPr/>
-        </p:nvSpPr>
-        <p:spPr>
-          <a:xfrm>
-            <a:off x="594360" y="4251960"/>
-            <a:ext cx="11002975" cy="347472"/>
-          </a:xfrm>
-          <a:prstGeom prst="rect">
-            <a:avLst/>
-          </a:prstGeom>
-          <a:noFill/>
-        </p:spPr>
-        <p:txBody>
-          <a:bodyPr wrap="square">
-            <a:spAutoFit/>
-          </a:bodyPr>
-          <a:lstStyle/>
-          <a:p>
-            <a:pPr algn="ctr"/>
-            <a:r>
-              <a:rPr sz="2200" b="0" i="1">
-                <a:solidFill>
-                  <a:srgbClr val="8C8C8C"/>
-                </a:solidFill>
-                <a:latin typeface="Arial"/>
-              </a:rPr>
-              <a:t/>
             </a:r>
           </a:p>
         </p:txBody>
@@ -4021,23 +3881,23 @@
         </p:nvSpPr>
         <p:spPr>
           <a:xfrm>
-            <a:off x="594360" y="2258568"/>
-            <a:ext cx="11002975" cy="685800"/>
-          </a:xfrm>
-          <a:prstGeom prst="rect">
-            <a:avLst/>
-          </a:prstGeom>
-          <a:noFill/>
-        </p:spPr>
-        <p:txBody>
-          <a:bodyPr wrap="square">
-            <a:spAutoFit/>
-          </a:bodyPr>
-          <a:lstStyle/>
-          <a:p>
-            <a:pPr algn="ctr"/>
-            <a:r>
-              <a:rPr sz="4400" b="1" i="0">
+            <a:off x="640080" y="2052828"/>
+            <a:ext cx="10911535" cy="731520"/>
+          </a:xfrm>
+          <a:prstGeom prst="rect">
+            <a:avLst/>
+          </a:prstGeom>
+          <a:noFill/>
+        </p:spPr>
+        <p:txBody>
+          <a:bodyPr wrap="square">
+            <a:spAutoFit/>
+          </a:bodyPr>
+          <a:lstStyle/>
+          <a:p>
+            <a:pPr algn="ctr"/>
+            <a:r>
+              <a:rPr sz="4800" b="1" i="0">
                 <a:solidFill>
                   <a:srgbClr val="FFFFFF"/>
                 </a:solidFill>
@@ -4056,99 +3916,29 @@
         </p:nvSpPr>
         <p:spPr>
           <a:xfrm>
-            <a:off x="594360" y="2980944"/>
-            <a:ext cx="11002975" cy="347472"/>
-          </a:xfrm>
-          <a:prstGeom prst="rect">
-            <a:avLst/>
-          </a:prstGeom>
-          <a:noFill/>
-        </p:spPr>
-        <p:txBody>
-          <a:bodyPr wrap="square">
-            <a:spAutoFit/>
-          </a:bodyPr>
-          <a:lstStyle/>
-          <a:p>
-            <a:pPr algn="ctr"/>
-            <a:r>
-              <a:rPr sz="2200" b="0" i="1">
-                <a:solidFill>
-                  <a:srgbClr val="8C8C8C"/>
-                </a:solidFill>
-                <a:latin typeface="Arial"/>
-              </a:rPr>
-              <a:t/>
-            </a:r>
-          </a:p>
-        </p:txBody>
-      </p:sp>
-      <p:sp>
-        <p:nvSpPr>
-          <p:cNvPr id="4" name="TextBox 3"/>
-          <p:cNvSpPr txBox="1"/>
-          <p:nvPr/>
-        </p:nvSpPr>
-        <p:spPr>
-          <a:xfrm>
-            <a:off x="594360" y="3529584"/>
-            <a:ext cx="11002975" cy="685800"/>
-          </a:xfrm>
-          <a:prstGeom prst="rect">
-            <a:avLst/>
-          </a:prstGeom>
-          <a:noFill/>
-        </p:spPr>
-        <p:txBody>
-          <a:bodyPr wrap="square">
-            <a:spAutoFit/>
-          </a:bodyPr>
-          <a:lstStyle/>
-          <a:p>
-            <a:pPr algn="ctr"/>
-            <a:r>
-              <a:rPr sz="4400" b="1" i="0">
+            <a:off x="640080" y="2985516"/>
+            <a:ext cx="10911535" cy="731520"/>
+          </a:xfrm>
+          <a:prstGeom prst="rect">
+            <a:avLst/>
+          </a:prstGeom>
+          <a:noFill/>
+        </p:spPr>
+        <p:txBody>
+          <a:bodyPr wrap="square">
+            <a:spAutoFit/>
+          </a:bodyPr>
+          <a:lstStyle/>
+          <a:p>
+            <a:pPr algn="ctr"/>
+            <a:r>
+              <a:rPr sz="4800" b="1" i="0">
                 <a:solidFill>
                   <a:srgbClr val="FFFFFF"/>
                 </a:solidFill>
                 <a:latin typeface="Arial"/>
               </a:rPr>
               <a:t>Todo outro chão é areia movediça</a:t>
-            </a:r>
-          </a:p>
-        </p:txBody>
-      </p:sp>
-      <p:sp>
-        <p:nvSpPr>
-          <p:cNvPr id="5" name="TextBox 4"/>
-          <p:cNvSpPr txBox="1"/>
-          <p:nvPr/>
-        </p:nvSpPr>
-        <p:spPr>
-          <a:xfrm>
-            <a:off x="594360" y="4251960"/>
-            <a:ext cx="11002975" cy="347472"/>
-          </a:xfrm>
-          <a:prstGeom prst="rect">
-            <a:avLst/>
-          </a:prstGeom>
-          <a:noFill/>
-        </p:spPr>
-        <p:txBody>
-          <a:bodyPr wrap="square">
-            <a:spAutoFit/>
-          </a:bodyPr>
-          <a:lstStyle/>
-          <a:p>
-            <a:pPr algn="ctr"/>
-            <a:r>
-              <a:rPr sz="2200" b="0" i="1">
-                <a:solidFill>
-                  <a:srgbClr val="8C8C8C"/>
-                </a:solidFill>
-                <a:latin typeface="Arial"/>
-              </a:rPr>
-              <a:t/>
             </a:r>
           </a:p>
         </p:txBody>
@@ -4187,23 +3977,23 @@
         </p:nvSpPr>
         <p:spPr>
           <a:xfrm>
-            <a:off x="594360" y="2258568"/>
-            <a:ext cx="11002975" cy="685800"/>
-          </a:xfrm>
-          <a:prstGeom prst="rect">
-            <a:avLst/>
-          </a:prstGeom>
-          <a:noFill/>
-        </p:spPr>
-        <p:txBody>
-          <a:bodyPr wrap="square">
-            <a:spAutoFit/>
-          </a:bodyPr>
-          <a:lstStyle/>
-          <a:p>
-            <a:pPr algn="ctr"/>
-            <a:r>
-              <a:rPr sz="4400" b="1" i="0">
+            <a:off x="640080" y="2052828"/>
+            <a:ext cx="10911535" cy="731520"/>
+          </a:xfrm>
+          <a:prstGeom prst="rect">
+            <a:avLst/>
+          </a:prstGeom>
+          <a:noFill/>
+        </p:spPr>
+        <p:txBody>
+          <a:bodyPr wrap="square">
+            <a:spAutoFit/>
+          </a:bodyPr>
+          <a:lstStyle/>
+          <a:p>
+            <a:pPr algn="ctr"/>
+            <a:r>
+              <a:rPr sz="4800" b="1" i="0">
                 <a:solidFill>
                   <a:srgbClr val="FFFFFF"/>
                 </a:solidFill>
@@ -4222,25 +4012,60 @@
         </p:nvSpPr>
         <p:spPr>
           <a:xfrm>
-            <a:off x="594360" y="2980944"/>
-            <a:ext cx="11002975" cy="347472"/>
-          </a:xfrm>
-          <a:prstGeom prst="rect">
-            <a:avLst/>
-          </a:prstGeom>
-          <a:noFill/>
-        </p:spPr>
-        <p:txBody>
-          <a:bodyPr wrap="square">
-            <a:spAutoFit/>
-          </a:bodyPr>
-          <a:lstStyle/>
-          <a:p>
-            <a:pPr algn="ctr"/>
-            <a:r>
-              <a:rPr sz="2200" b="0" i="1">
-                <a:solidFill>
-                  <a:srgbClr val="8C8C8C"/>
+            <a:off x="640080" y="2985516"/>
+            <a:ext cx="10911535" cy="731520"/>
+          </a:xfrm>
+          <a:prstGeom prst="rect">
+            <a:avLst/>
+          </a:prstGeom>
+          <a:noFill/>
+        </p:spPr>
+        <p:txBody>
+          <a:bodyPr wrap="square">
+            <a:spAutoFit/>
+          </a:bodyPr>
+          <a:lstStyle/>
+          <a:p>
+            <a:pPr algn="ctr"/>
+            <a:r>
+              <a:rPr sz="4800" b="1" i="0">
+                <a:solidFill>
+                  <a:srgbClr val="FFFFFF"/>
+                </a:solidFill>
+                <a:latin typeface="Arial"/>
+              </a:rPr>
+              <a:t>Minha esperança está firme em Ti</a:t>
+            </a:r>
+          </a:p>
+        </p:txBody>
+      </p:sp>
+      <p:sp>
+        <p:nvSpPr>
+          <p:cNvPr id="4" name="TextBox 3"/>
+          <p:cNvSpPr txBox="1"/>
+          <p:nvPr/>
+        </p:nvSpPr>
+        <p:spPr>
+          <a:xfrm>
+            <a:off x="640080" y="4128516"/>
+            <a:ext cx="10911535" cy="310896"/>
+          </a:xfrm>
+          <a:prstGeom prst="rect">
+            <a:avLst/>
+          </a:prstGeom>
+          <a:noFill/>
+        </p:spPr>
+        <p:txBody>
+          <a:bodyPr wrap="square">
+            <a:spAutoFit/>
+          </a:bodyPr>
+          <a:lstStyle/>
+          <a:p>
+            <a:pPr algn="ctr"/>
+            <a:r>
+              <a:rPr sz="2000" b="0" i="0">
+                <a:solidFill>
+                  <a:srgbClr val="828282"/>
                 </a:solidFill>
                 <a:latin typeface="Arial"/>
               </a:rPr>
@@ -4251,66 +4076,31 @@
       </p:sp>
       <p:sp>
         <p:nvSpPr>
-          <p:cNvPr id="4" name="TextBox 3"/>
-          <p:cNvSpPr txBox="1"/>
-          <p:nvPr/>
-        </p:nvSpPr>
-        <p:spPr>
-          <a:xfrm>
-            <a:off x="594360" y="3529584"/>
-            <a:ext cx="11002975" cy="685800"/>
-          </a:xfrm>
-          <a:prstGeom prst="rect">
-            <a:avLst/>
-          </a:prstGeom>
-          <a:noFill/>
-        </p:spPr>
-        <p:txBody>
-          <a:bodyPr wrap="square">
-            <a:spAutoFit/>
-          </a:bodyPr>
-          <a:lstStyle/>
-          <a:p>
-            <a:pPr algn="ctr"/>
-            <a:r>
-              <a:rPr sz="4400" b="1" i="0">
-                <a:solidFill>
-                  <a:srgbClr val="FFFFFF"/>
-                </a:solidFill>
-                <a:latin typeface="Arial"/>
-              </a:rPr>
-              <a:t>Minha esperança está firme em Ti</a:t>
-            </a:r>
-          </a:p>
-        </p:txBody>
-      </p:sp>
-      <p:sp>
-        <p:nvSpPr>
           <p:cNvPr id="5" name="TextBox 4"/>
           <p:cNvSpPr txBox="1"/>
           <p:nvPr/>
         </p:nvSpPr>
         <p:spPr>
           <a:xfrm>
-            <a:off x="594360" y="4251960"/>
-            <a:ext cx="11002975" cy="347472"/>
-          </a:xfrm>
-          <a:prstGeom prst="rect">
-            <a:avLst/>
-          </a:prstGeom>
-          <a:noFill/>
-        </p:spPr>
-        <p:txBody>
-          <a:bodyPr wrap="square">
-            <a:spAutoFit/>
-          </a:bodyPr>
-          <a:lstStyle/>
-          <a:p>
-            <a:pPr algn="ctr"/>
-            <a:r>
-              <a:rPr sz="2200" b="0" i="1">
-                <a:solidFill>
-                  <a:srgbClr val="8C8C8C"/>
+            <a:off x="640080" y="4494276"/>
+            <a:ext cx="10911535" cy="310896"/>
+          </a:xfrm>
+          <a:prstGeom prst="rect">
+            <a:avLst/>
+          </a:prstGeom>
+          <a:noFill/>
+        </p:spPr>
+        <p:txBody>
+          <a:bodyPr wrap="square">
+            <a:spAutoFit/>
+          </a:bodyPr>
+          <a:lstStyle/>
+          <a:p>
+            <a:pPr algn="ctr"/>
+            <a:r>
+              <a:rPr sz="2000" b="0" i="0">
+                <a:solidFill>
+                  <a:srgbClr val="828282"/>
                 </a:solidFill>
                 <a:latin typeface="Arial"/>
               </a:rPr>
@@ -4353,23 +4143,23 @@
         </p:nvSpPr>
         <p:spPr>
           <a:xfrm>
-            <a:off x="594360" y="2258568"/>
-            <a:ext cx="11002975" cy="685800"/>
-          </a:xfrm>
-          <a:prstGeom prst="rect">
-            <a:avLst/>
-          </a:prstGeom>
-          <a:noFill/>
-        </p:spPr>
-        <p:txBody>
-          <a:bodyPr wrap="square">
-            <a:spAutoFit/>
-          </a:bodyPr>
-          <a:lstStyle/>
-          <a:p>
-            <a:pPr algn="ctr"/>
-            <a:r>
-              <a:rPr sz="4400" b="1" i="0">
+            <a:off x="640080" y="2052828"/>
+            <a:ext cx="10911535" cy="731520"/>
+          </a:xfrm>
+          <a:prstGeom prst="rect">
+            <a:avLst/>
+          </a:prstGeom>
+          <a:noFill/>
+        </p:spPr>
+        <p:txBody>
+          <a:bodyPr wrap="square">
+            <a:spAutoFit/>
+          </a:bodyPr>
+          <a:lstStyle/>
+          <a:p>
+            <a:pPr algn="ctr"/>
+            <a:r>
+              <a:rPr sz="4800" b="1" i="0">
                 <a:solidFill>
                   <a:srgbClr val="FFFFFF"/>
                 </a:solidFill>
@@ -4388,25 +4178,60 @@
         </p:nvSpPr>
         <p:spPr>
           <a:xfrm>
-            <a:off x="594360" y="2980944"/>
-            <a:ext cx="11002975" cy="347472"/>
-          </a:xfrm>
-          <a:prstGeom prst="rect">
-            <a:avLst/>
-          </a:prstGeom>
-          <a:noFill/>
-        </p:spPr>
-        <p:txBody>
-          <a:bodyPr wrap="square">
-            <a:spAutoFit/>
-          </a:bodyPr>
-          <a:lstStyle/>
-          <a:p>
-            <a:pPr algn="ctr"/>
-            <a:r>
-              <a:rPr sz="2200" b="0" i="1">
-                <a:solidFill>
-                  <a:srgbClr val="8C8C8C"/>
+            <a:off x="640080" y="2985516"/>
+            <a:ext cx="10911535" cy="731520"/>
+          </a:xfrm>
+          <a:prstGeom prst="rect">
+            <a:avLst/>
+          </a:prstGeom>
+          <a:noFill/>
+        </p:spPr>
+        <p:txBody>
+          <a:bodyPr wrap="square">
+            <a:spAutoFit/>
+          </a:bodyPr>
+          <a:lstStyle/>
+          <a:p>
+            <a:pPr algn="ctr"/>
+            <a:r>
+              <a:rPr sz="4000" b="1" i="0">
+                <a:solidFill>
+                  <a:srgbClr val="FFFFFF"/>
+                </a:solidFill>
+                <a:latin typeface="Arial"/>
+              </a:rPr>
+              <a:t>Seu juramento, Sua aliança, Seu sangue</a:t>
+            </a:r>
+          </a:p>
+        </p:txBody>
+      </p:sp>
+      <p:sp>
+        <p:nvSpPr>
+          <p:cNvPr id="4" name="TextBox 3"/>
+          <p:cNvSpPr txBox="1"/>
+          <p:nvPr/>
+        </p:nvSpPr>
+        <p:spPr>
+          <a:xfrm>
+            <a:off x="640080" y="4128516"/>
+            <a:ext cx="10911535" cy="310896"/>
+          </a:xfrm>
+          <a:prstGeom prst="rect">
+            <a:avLst/>
+          </a:prstGeom>
+          <a:noFill/>
+        </p:spPr>
+        <p:txBody>
+          <a:bodyPr wrap="square">
+            <a:spAutoFit/>
+          </a:bodyPr>
+          <a:lstStyle/>
+          <a:p>
+            <a:pPr algn="ctr"/>
+            <a:r>
+              <a:rPr sz="2000" b="0" i="0">
+                <a:solidFill>
+                  <a:srgbClr val="828282"/>
                 </a:solidFill>
                 <a:latin typeface="Arial"/>
               </a:rPr>
@@ -4417,66 +4242,31 @@
       </p:sp>
       <p:sp>
         <p:nvSpPr>
-          <p:cNvPr id="4" name="TextBox 3"/>
-          <p:cNvSpPr txBox="1"/>
-          <p:nvPr/>
-        </p:nvSpPr>
-        <p:spPr>
-          <a:xfrm>
-            <a:off x="594360" y="3529584"/>
-            <a:ext cx="11002975" cy="685800"/>
-          </a:xfrm>
-          <a:prstGeom prst="rect">
-            <a:avLst/>
-          </a:prstGeom>
-          <a:noFill/>
-        </p:spPr>
-        <p:txBody>
-          <a:bodyPr wrap="square">
-            <a:spAutoFit/>
-          </a:bodyPr>
-          <a:lstStyle/>
-          <a:p>
-            <a:pPr algn="ctr"/>
-            <a:r>
-              <a:rPr sz="3705" b="1" i="0">
-                <a:solidFill>
-                  <a:srgbClr val="FFFFFF"/>
-                </a:solidFill>
-                <a:latin typeface="Arial"/>
-              </a:rPr>
-              <a:t>Seu juramento, Sua aliança, Seu sangue</a:t>
-            </a:r>
-          </a:p>
-        </p:txBody>
-      </p:sp>
-      <p:sp>
-        <p:nvSpPr>
           <p:cNvPr id="5" name="TextBox 4"/>
           <p:cNvSpPr txBox="1"/>
           <p:nvPr/>
         </p:nvSpPr>
         <p:spPr>
           <a:xfrm>
-            <a:off x="594360" y="4251960"/>
-            <a:ext cx="11002975" cy="347472"/>
-          </a:xfrm>
-          <a:prstGeom prst="rect">
-            <a:avLst/>
-          </a:prstGeom>
-          <a:noFill/>
-        </p:spPr>
-        <p:txBody>
-          <a:bodyPr wrap="square">
-            <a:spAutoFit/>
-          </a:bodyPr>
-          <a:lstStyle/>
-          <a:p>
-            <a:pPr algn="ctr"/>
-            <a:r>
-              <a:rPr sz="2200" b="0" i="1">
-                <a:solidFill>
-                  <a:srgbClr val="8C8C8C"/>
+            <a:off x="640080" y="4494276"/>
+            <a:ext cx="10911535" cy="310896"/>
+          </a:xfrm>
+          <a:prstGeom prst="rect">
+            <a:avLst/>
+          </a:prstGeom>
+          <a:noFill/>
+        </p:spPr>
+        <p:txBody>
+          <a:bodyPr wrap="square">
+            <a:spAutoFit/>
+          </a:bodyPr>
+          <a:lstStyle/>
+          <a:p>
+            <a:pPr algn="ctr"/>
+            <a:r>
+              <a:rPr sz="2000" b="0" i="0">
+                <a:solidFill>
+                  <a:srgbClr val="828282"/>
                 </a:solidFill>
                 <a:latin typeface="Arial"/>
               </a:rPr>
@@ -4519,23 +4309,23 @@
         </p:nvSpPr>
         <p:spPr>
           <a:xfrm>
-            <a:off x="594360" y="2258568"/>
-            <a:ext cx="11002975" cy="685800"/>
-          </a:xfrm>
-          <a:prstGeom prst="rect">
-            <a:avLst/>
-          </a:prstGeom>
-          <a:noFill/>
-        </p:spPr>
-        <p:txBody>
-          <a:bodyPr wrap="square">
-            <a:spAutoFit/>
-          </a:bodyPr>
-          <a:lstStyle/>
-          <a:p>
-            <a:pPr algn="ctr"/>
-            <a:r>
-              <a:rPr sz="3911" b="1" i="0">
+            <a:off x="640080" y="2052828"/>
+            <a:ext cx="10911535" cy="731520"/>
+          </a:xfrm>
+          <a:prstGeom prst="rect">
+            <a:avLst/>
+          </a:prstGeom>
+          <a:noFill/>
+        </p:spPr>
+        <p:txBody>
+          <a:bodyPr wrap="square">
+            <a:spAutoFit/>
+          </a:bodyPr>
+          <a:lstStyle/>
+          <a:p>
+            <a:pPr algn="ctr"/>
+            <a:r>
+              <a:rPr sz="4200" b="1" i="0">
                 <a:solidFill>
                   <a:srgbClr val="FFFFFF"/>
                 </a:solidFill>
@@ -4554,25 +4344,60 @@
         </p:nvSpPr>
         <p:spPr>
           <a:xfrm>
-            <a:off x="594360" y="2980944"/>
-            <a:ext cx="11002975" cy="347472"/>
-          </a:xfrm>
-          <a:prstGeom prst="rect">
-            <a:avLst/>
-          </a:prstGeom>
-          <a:noFill/>
-        </p:spPr>
-        <p:txBody>
-          <a:bodyPr wrap="square">
-            <a:spAutoFit/>
-          </a:bodyPr>
-          <a:lstStyle/>
-          <a:p>
-            <a:pPr algn="ctr"/>
-            <a:r>
-              <a:rPr sz="2200" b="0" i="1">
-                <a:solidFill>
-                  <a:srgbClr val="8C8C8C"/>
+            <a:off x="640080" y="2985516"/>
+            <a:ext cx="10911535" cy="731520"/>
+          </a:xfrm>
+          <a:prstGeom prst="rect">
+            <a:avLst/>
+          </a:prstGeom>
+          <a:noFill/>
+        </p:spPr>
+        <p:txBody>
+          <a:bodyPr wrap="square">
+            <a:spAutoFit/>
+          </a:bodyPr>
+          <a:lstStyle/>
+          <a:p>
+            <a:pPr algn="ctr"/>
+            <a:r>
+              <a:rPr sz="4100" b="1" i="0">
+                <a:solidFill>
+                  <a:srgbClr val="FFFFFF"/>
+                </a:solidFill>
+                <a:latin typeface="Arial"/>
+              </a:rPr>
+              <a:t>Quando tudo mais cede e vai se embora</a:t>
+            </a:r>
+          </a:p>
+        </p:txBody>
+      </p:sp>
+      <p:sp>
+        <p:nvSpPr>
+          <p:cNvPr id="4" name="TextBox 3"/>
+          <p:cNvSpPr txBox="1"/>
+          <p:nvPr/>
+        </p:nvSpPr>
+        <p:spPr>
+          <a:xfrm>
+            <a:off x="640080" y="4128516"/>
+            <a:ext cx="10911535" cy="310896"/>
+          </a:xfrm>
+          <a:prstGeom prst="rect">
+            <a:avLst/>
+          </a:prstGeom>
+          <a:noFill/>
+        </p:spPr>
+        <p:txBody>
+          <a:bodyPr wrap="square">
+            <a:spAutoFit/>
+          </a:bodyPr>
+          <a:lstStyle/>
+          <a:p>
+            <a:pPr algn="ctr"/>
+            <a:r>
+              <a:rPr sz="2000" b="0" i="0">
+                <a:solidFill>
+                  <a:srgbClr val="828282"/>
                 </a:solidFill>
                 <a:latin typeface="Arial"/>
               </a:rPr>
@@ -4583,66 +4408,31 @@
       </p:sp>
       <p:sp>
         <p:nvSpPr>
-          <p:cNvPr id="4" name="TextBox 3"/>
-          <p:cNvSpPr txBox="1"/>
-          <p:nvPr/>
-        </p:nvSpPr>
-        <p:spPr>
-          <a:xfrm>
-            <a:off x="594360" y="3529584"/>
-            <a:ext cx="11002975" cy="685800"/>
-          </a:xfrm>
-          <a:prstGeom prst="rect">
-            <a:avLst/>
-          </a:prstGeom>
-          <a:noFill/>
-        </p:spPr>
-        <p:txBody>
-          <a:bodyPr wrap="square">
-            <a:spAutoFit/>
-          </a:bodyPr>
-          <a:lstStyle/>
-          <a:p>
-            <a:pPr algn="ctr"/>
-            <a:r>
-              <a:rPr sz="3805" b="1" i="0">
-                <a:solidFill>
-                  <a:srgbClr val="FFFFFF"/>
-                </a:solidFill>
-                <a:latin typeface="Arial"/>
-              </a:rPr>
-              <a:t>Quando tudo mais cede e vai se embora</a:t>
-            </a:r>
-          </a:p>
-        </p:txBody>
-      </p:sp>
-      <p:sp>
-        <p:nvSpPr>
           <p:cNvPr id="5" name="TextBox 4"/>
           <p:cNvSpPr txBox="1"/>
           <p:nvPr/>
         </p:nvSpPr>
         <p:spPr>
           <a:xfrm>
-            <a:off x="594360" y="4251960"/>
-            <a:ext cx="11002975" cy="347472"/>
-          </a:xfrm>
-          <a:prstGeom prst="rect">
-            <a:avLst/>
-          </a:prstGeom>
-          <a:noFill/>
-        </p:spPr>
-        <p:txBody>
-          <a:bodyPr wrap="square">
-            <a:spAutoFit/>
-          </a:bodyPr>
-          <a:lstStyle/>
-          <a:p>
-            <a:pPr algn="ctr"/>
-            <a:r>
-              <a:rPr sz="2200" b="0" i="1">
-                <a:solidFill>
-                  <a:srgbClr val="8C8C8C"/>
+            <a:off x="640080" y="4494276"/>
+            <a:ext cx="10911535" cy="310896"/>
+          </a:xfrm>
+          <a:prstGeom prst="rect">
+            <a:avLst/>
+          </a:prstGeom>
+          <a:noFill/>
+        </p:spPr>
+        <p:txBody>
+          <a:bodyPr wrap="square">
+            <a:spAutoFit/>
+          </a:bodyPr>
+          <a:lstStyle/>
+          <a:p>
+            <a:pPr algn="ctr"/>
+            <a:r>
+              <a:rPr sz="2000" b="0" i="0">
+                <a:solidFill>
+                  <a:srgbClr val="828282"/>
                 </a:solidFill>
                 <a:latin typeface="Arial"/>
               </a:rPr>
@@ -4685,23 +4475,23 @@
         </p:nvSpPr>
         <p:spPr>
           <a:xfrm>
-            <a:off x="594360" y="1837944"/>
-            <a:ext cx="11002975" cy="685800"/>
-          </a:xfrm>
-          <a:prstGeom prst="rect">
-            <a:avLst/>
-          </a:prstGeom>
-          <a:noFill/>
-        </p:spPr>
-        <p:txBody>
-          <a:bodyPr wrap="square">
-            <a:spAutoFit/>
-          </a:bodyPr>
-          <a:lstStyle/>
-          <a:p>
-            <a:pPr algn="ctr"/>
-            <a:r>
-              <a:rPr sz="4400" b="1" i="0">
+            <a:off x="640080" y="1650492"/>
+            <a:ext cx="10911535" cy="731520"/>
+          </a:xfrm>
+          <a:prstGeom prst="rect">
+            <a:avLst/>
+          </a:prstGeom>
+          <a:noFill/>
+        </p:spPr>
+        <p:txBody>
+          <a:bodyPr wrap="square">
+            <a:spAutoFit/>
+          </a:bodyPr>
+          <a:lstStyle/>
+          <a:p>
+            <a:pPr algn="ctr"/>
+            <a:r>
+              <a:rPr sz="4800" b="1" i="0">
                 <a:solidFill>
                   <a:srgbClr val="FFFFFF"/>
                 </a:solidFill>
@@ -4720,8 +4510,8 @@
         </p:nvSpPr>
         <p:spPr>
           <a:xfrm>
-            <a:off x="594360" y="2560320"/>
-            <a:ext cx="11002975" cy="384048"/>
+            <a:off x="640080" y="2418588"/>
+            <a:ext cx="10911535" cy="365760"/>
           </a:xfrm>
           <a:prstGeom prst="rect">
             <a:avLst/>
@@ -4738,7 +4528,7 @@
             <a:r>
               <a:rPr sz="2400" b="0" i="1">
                 <a:solidFill>
-                  <a:srgbClr val="B4B4B4"/>
+                  <a:srgbClr val="AAAAAA"/>
                 </a:solidFill>
                 <a:latin typeface="Arial"/>
               </a:rPr>
@@ -4755,8 +4545,78 @@
         </p:nvSpPr>
         <p:spPr>
           <a:xfrm>
-            <a:off x="594360" y="2980944"/>
-            <a:ext cx="11002975" cy="347472"/>
+            <a:off x="640080" y="2985516"/>
+            <a:ext cx="10911535" cy="731520"/>
+          </a:xfrm>
+          <a:prstGeom prst="rect">
+            <a:avLst/>
+          </a:prstGeom>
+          <a:noFill/>
+        </p:spPr>
+        <p:txBody>
+          <a:bodyPr wrap="square">
+            <a:spAutoFit/>
+          </a:bodyPr>
+          <a:lstStyle/>
+          <a:p>
+            <a:pPr algn="ctr"/>
+            <a:r>
+              <a:rPr sz="4800" b="1" i="0">
+                <a:solidFill>
+                  <a:srgbClr val="FFFFFF"/>
+                </a:solidFill>
+                <a:latin typeface="Arial"/>
+              </a:rPr>
+              <a:t>揺るがぬいしずえ</a:t>
+            </a:r>
+          </a:p>
+        </p:txBody>
+      </p:sp>
+      <p:sp>
+        <p:nvSpPr>
+          <p:cNvPr id="5" name="TextBox 4"/>
+          <p:cNvSpPr txBox="1"/>
+          <p:nvPr/>
+        </p:nvSpPr>
+        <p:spPr>
+          <a:xfrm>
+            <a:off x="640080" y="3753612"/>
+            <a:ext cx="10911535" cy="365760"/>
+          </a:xfrm>
+          <a:prstGeom prst="rect">
+            <a:avLst/>
+          </a:prstGeom>
+          <a:noFill/>
+        </p:spPr>
+        <p:txBody>
+          <a:bodyPr wrap="square">
+            <a:spAutoFit/>
+          </a:bodyPr>
+          <a:lstStyle/>
+          <a:p>
+            <a:pPr algn="ctr"/>
+            <a:r>
+              <a:rPr sz="2400" b="0" i="1">
+                <a:solidFill>
+                  <a:srgbClr val="AAAAAA"/>
+                </a:solidFill>
+                <a:latin typeface="Arial"/>
+              </a:rPr>
+              <a:t>yuru ga nuishizue</a:t>
+            </a:r>
+          </a:p>
+        </p:txBody>
+      </p:sp>
+      <p:sp>
+        <p:nvSpPr>
+          <p:cNvPr id="6" name="TextBox 5"/>
+          <p:cNvSpPr txBox="1"/>
+          <p:nvPr/>
+        </p:nvSpPr>
+        <p:spPr>
+          <a:xfrm>
+            <a:off x="640080" y="4530852"/>
+            <a:ext cx="10911535" cy="310896"/>
           </a:xfrm>
           <a:prstGeom prst="rect">
             <a:avLst/>
@@ -4773,7 +4633,7 @@
             <a:r>
               <a:rPr sz="2000" b="0" i="1">
                 <a:solidFill>
-                  <a:srgbClr val="8C8C8C"/>
+                  <a:srgbClr val="828282"/>
                 </a:solidFill>
                 <a:latin typeface="Arial"/>
               </a:rPr>
@@ -4784,84 +4644,14 @@
       </p:sp>
       <p:sp>
         <p:nvSpPr>
-          <p:cNvPr id="5" name="TextBox 4"/>
-          <p:cNvSpPr txBox="1"/>
-          <p:nvPr/>
-        </p:nvSpPr>
-        <p:spPr>
-          <a:xfrm>
-            <a:off x="594360" y="3529584"/>
-            <a:ext cx="11002975" cy="685800"/>
-          </a:xfrm>
-          <a:prstGeom prst="rect">
-            <a:avLst/>
-          </a:prstGeom>
-          <a:noFill/>
-        </p:spPr>
-        <p:txBody>
-          <a:bodyPr wrap="square">
-            <a:spAutoFit/>
-          </a:bodyPr>
-          <a:lstStyle/>
-          <a:p>
-            <a:pPr algn="ctr"/>
-            <a:r>
-              <a:rPr sz="4400" b="1" i="0">
-                <a:solidFill>
-                  <a:srgbClr val="FFFFFF"/>
-                </a:solidFill>
-                <a:latin typeface="Arial"/>
-              </a:rPr>
-              <a:t>揺るがぬいしずえ</a:t>
-            </a:r>
-          </a:p>
-        </p:txBody>
-      </p:sp>
-      <p:sp>
-        <p:nvSpPr>
-          <p:cNvPr id="6" name="TextBox 5"/>
-          <p:cNvSpPr txBox="1"/>
-          <p:nvPr/>
-        </p:nvSpPr>
-        <p:spPr>
-          <a:xfrm>
-            <a:off x="594360" y="4251960"/>
-            <a:ext cx="11002975" cy="384048"/>
-          </a:xfrm>
-          <a:prstGeom prst="rect">
-            <a:avLst/>
-          </a:prstGeom>
-          <a:noFill/>
-        </p:spPr>
-        <p:txBody>
-          <a:bodyPr wrap="square">
-            <a:spAutoFit/>
-          </a:bodyPr>
-          <a:lstStyle/>
-          <a:p>
-            <a:pPr algn="ctr"/>
-            <a:r>
-              <a:rPr sz="2400" b="0" i="1">
-                <a:solidFill>
-                  <a:srgbClr val="B4B4B4"/>
-                </a:solidFill>
-                <a:latin typeface="Arial"/>
-              </a:rPr>
-              <a:t>yuru ga nuishizue</a:t>
-            </a:r>
-          </a:p>
-        </p:txBody>
-      </p:sp>
-      <p:sp>
-        <p:nvSpPr>
           <p:cNvPr id="7" name="TextBox 6"/>
           <p:cNvSpPr txBox="1"/>
           <p:nvPr/>
         </p:nvSpPr>
         <p:spPr>
           <a:xfrm>
-            <a:off x="594360" y="4672584"/>
-            <a:ext cx="11002975" cy="347472"/>
+            <a:off x="640080" y="4896612"/>
+            <a:ext cx="10911535" cy="310896"/>
           </a:xfrm>
           <a:prstGeom prst="rect">
             <a:avLst/>
@@ -4878,7 +4668,7 @@
             <a:r>
               <a:rPr sz="2000" b="0" i="1">
                 <a:solidFill>
-                  <a:srgbClr val="8C8C8C"/>
+                  <a:srgbClr val="828282"/>
                 </a:solidFill>
                 <a:latin typeface="Arial"/>
               </a:rPr>
@@ -4921,23 +4711,23 @@
         </p:nvSpPr>
         <p:spPr>
           <a:xfrm>
-            <a:off x="594360" y="2258568"/>
-            <a:ext cx="11002975" cy="685800"/>
-          </a:xfrm>
-          <a:prstGeom prst="rect">
-            <a:avLst/>
-          </a:prstGeom>
-          <a:noFill/>
-        </p:spPr>
-        <p:txBody>
-          <a:bodyPr wrap="square">
-            <a:spAutoFit/>
-          </a:bodyPr>
-          <a:lstStyle/>
-          <a:p>
-            <a:pPr algn="ctr"/>
-            <a:r>
-              <a:rPr sz="4400" b="1" i="0">
+            <a:off x="640080" y="2052828"/>
+            <a:ext cx="10911535" cy="731520"/>
+          </a:xfrm>
+          <a:prstGeom prst="rect">
+            <a:avLst/>
+          </a:prstGeom>
+          <a:noFill/>
+        </p:spPr>
+        <p:txBody>
+          <a:bodyPr wrap="square">
+            <a:spAutoFit/>
+          </a:bodyPr>
+          <a:lstStyle/>
+          <a:p>
+            <a:pPr algn="ctr"/>
+            <a:r>
+              <a:rPr sz="4800" b="1" i="0">
                 <a:solidFill>
                   <a:srgbClr val="FFFFFF"/>
                 </a:solidFill>
@@ -4956,25 +4746,60 @@
         </p:nvSpPr>
         <p:spPr>
           <a:xfrm>
-            <a:off x="594360" y="2980944"/>
-            <a:ext cx="11002975" cy="347472"/>
-          </a:xfrm>
-          <a:prstGeom prst="rect">
-            <a:avLst/>
-          </a:prstGeom>
-          <a:noFill/>
-        </p:spPr>
-        <p:txBody>
-          <a:bodyPr wrap="square">
-            <a:spAutoFit/>
-          </a:bodyPr>
-          <a:lstStyle/>
-          <a:p>
-            <a:pPr algn="ctr"/>
-            <a:r>
-              <a:rPr sz="2200" b="0" i="1">
-                <a:solidFill>
-                  <a:srgbClr val="8C8C8C"/>
+            <a:off x="640080" y="2985516"/>
+            <a:ext cx="10911535" cy="731520"/>
+          </a:xfrm>
+          <a:prstGeom prst="rect">
+            <a:avLst/>
+          </a:prstGeom>
+          <a:noFill/>
+        </p:spPr>
+        <p:txBody>
+          <a:bodyPr wrap="square">
+            <a:spAutoFit/>
+          </a:bodyPr>
+          <a:lstStyle/>
+          <a:p>
+            <a:pPr algn="ctr"/>
+            <a:r>
+              <a:rPr sz="4000" b="1" i="0">
+                <a:solidFill>
+                  <a:srgbClr val="FFFFFF"/>
+                </a:solidFill>
+                <a:latin typeface="Arial"/>
+              </a:rPr>
+              <a:t>Seu juramento, Sua aliança, Seu sangue</a:t>
+            </a:r>
+          </a:p>
+        </p:txBody>
+      </p:sp>
+      <p:sp>
+        <p:nvSpPr>
+          <p:cNvPr id="4" name="TextBox 3"/>
+          <p:cNvSpPr txBox="1"/>
+          <p:nvPr/>
+        </p:nvSpPr>
+        <p:spPr>
+          <a:xfrm>
+            <a:off x="640080" y="4128516"/>
+            <a:ext cx="10911535" cy="310896"/>
+          </a:xfrm>
+          <a:prstGeom prst="rect">
+            <a:avLst/>
+          </a:prstGeom>
+          <a:noFill/>
+        </p:spPr>
+        <p:txBody>
+          <a:bodyPr wrap="square">
+            <a:spAutoFit/>
+          </a:bodyPr>
+          <a:lstStyle/>
+          <a:p>
+            <a:pPr algn="ctr"/>
+            <a:r>
+              <a:rPr sz="2000" b="0" i="0">
+                <a:solidFill>
+                  <a:srgbClr val="828282"/>
                 </a:solidFill>
                 <a:latin typeface="Arial"/>
               </a:rPr>
@@ -4985,66 +4810,31 @@
       </p:sp>
       <p:sp>
         <p:nvSpPr>
-          <p:cNvPr id="4" name="TextBox 3"/>
-          <p:cNvSpPr txBox="1"/>
-          <p:nvPr/>
-        </p:nvSpPr>
-        <p:spPr>
-          <a:xfrm>
-            <a:off x="594360" y="3529584"/>
-            <a:ext cx="11002975" cy="685800"/>
-          </a:xfrm>
-          <a:prstGeom prst="rect">
-            <a:avLst/>
-          </a:prstGeom>
-          <a:noFill/>
-        </p:spPr>
-        <p:txBody>
-          <a:bodyPr wrap="square">
-            <a:spAutoFit/>
-          </a:bodyPr>
-          <a:lstStyle/>
-          <a:p>
-            <a:pPr algn="ctr"/>
-            <a:r>
-              <a:rPr sz="3705" b="1" i="0">
-                <a:solidFill>
-                  <a:srgbClr val="FFFFFF"/>
-                </a:solidFill>
-                <a:latin typeface="Arial"/>
-              </a:rPr>
-              <a:t>Seu juramento, Sua aliança, Seu sangue</a:t>
-            </a:r>
-          </a:p>
-        </p:txBody>
-      </p:sp>
-      <p:sp>
-        <p:nvSpPr>
           <p:cNvPr id="5" name="TextBox 4"/>
           <p:cNvSpPr txBox="1"/>
           <p:nvPr/>
         </p:nvSpPr>
         <p:spPr>
           <a:xfrm>
-            <a:off x="594360" y="4251960"/>
-            <a:ext cx="11002975" cy="347472"/>
-          </a:xfrm>
-          <a:prstGeom prst="rect">
-            <a:avLst/>
-          </a:prstGeom>
-          <a:noFill/>
-        </p:spPr>
-        <p:txBody>
-          <a:bodyPr wrap="square">
-            <a:spAutoFit/>
-          </a:bodyPr>
-          <a:lstStyle/>
-          <a:p>
-            <a:pPr algn="ctr"/>
-            <a:r>
-              <a:rPr sz="2200" b="0" i="1">
-                <a:solidFill>
-                  <a:srgbClr val="8C8C8C"/>
+            <a:off x="640080" y="4494276"/>
+            <a:ext cx="10911535" cy="310896"/>
+          </a:xfrm>
+          <a:prstGeom prst="rect">
+            <a:avLst/>
+          </a:prstGeom>
+          <a:noFill/>
+        </p:spPr>
+        <p:txBody>
+          <a:bodyPr wrap="square">
+            <a:spAutoFit/>
+          </a:bodyPr>
+          <a:lstStyle/>
+          <a:p>
+            <a:pPr algn="ctr"/>
+            <a:r>
+              <a:rPr sz="2000" b="0" i="0">
+                <a:solidFill>
+                  <a:srgbClr val="828282"/>
                 </a:solidFill>
                 <a:latin typeface="Arial"/>
               </a:rPr>
@@ -5087,23 +4877,23 @@
         </p:nvSpPr>
         <p:spPr>
           <a:xfrm>
-            <a:off x="594360" y="2258568"/>
-            <a:ext cx="11002975" cy="685800"/>
-          </a:xfrm>
-          <a:prstGeom prst="rect">
-            <a:avLst/>
-          </a:prstGeom>
-          <a:noFill/>
-        </p:spPr>
-        <p:txBody>
-          <a:bodyPr wrap="square">
-            <a:spAutoFit/>
-          </a:bodyPr>
-          <a:lstStyle/>
-          <a:p>
-            <a:pPr algn="ctr"/>
-            <a:r>
-              <a:rPr sz="3911" b="1" i="0">
+            <a:off x="640080" y="2052828"/>
+            <a:ext cx="10911535" cy="731520"/>
+          </a:xfrm>
+          <a:prstGeom prst="rect">
+            <a:avLst/>
+          </a:prstGeom>
+          <a:noFill/>
+        </p:spPr>
+        <p:txBody>
+          <a:bodyPr wrap="square">
+            <a:spAutoFit/>
+          </a:bodyPr>
+          <a:lstStyle/>
+          <a:p>
+            <a:pPr algn="ctr"/>
+            <a:r>
+              <a:rPr sz="4200" b="1" i="0">
                 <a:solidFill>
                   <a:srgbClr val="FFFFFF"/>
                 </a:solidFill>
@@ -5122,25 +4912,60 @@
         </p:nvSpPr>
         <p:spPr>
           <a:xfrm>
-            <a:off x="594360" y="2980944"/>
-            <a:ext cx="11002975" cy="347472"/>
-          </a:xfrm>
-          <a:prstGeom prst="rect">
-            <a:avLst/>
-          </a:prstGeom>
-          <a:noFill/>
-        </p:spPr>
-        <p:txBody>
-          <a:bodyPr wrap="square">
-            <a:spAutoFit/>
-          </a:bodyPr>
-          <a:lstStyle/>
-          <a:p>
-            <a:pPr algn="ctr"/>
-            <a:r>
-              <a:rPr sz="2200" b="0" i="1">
-                <a:solidFill>
-                  <a:srgbClr val="8C8C8C"/>
+            <a:off x="640080" y="2985516"/>
+            <a:ext cx="10911535" cy="731520"/>
+          </a:xfrm>
+          <a:prstGeom prst="rect">
+            <a:avLst/>
+          </a:prstGeom>
+          <a:noFill/>
+        </p:spPr>
+        <p:txBody>
+          <a:bodyPr wrap="square">
+            <a:spAutoFit/>
+          </a:bodyPr>
+          <a:lstStyle/>
+          <a:p>
+            <a:pPr algn="ctr"/>
+            <a:r>
+              <a:rPr sz="4100" b="1" i="0">
+                <a:solidFill>
+                  <a:srgbClr val="FFFFFF"/>
+                </a:solidFill>
+                <a:latin typeface="Arial"/>
+              </a:rPr>
+              <a:t>Quando tudo mais cede e vai se embora</a:t>
+            </a:r>
+          </a:p>
+        </p:txBody>
+      </p:sp>
+      <p:sp>
+        <p:nvSpPr>
+          <p:cNvPr id="4" name="TextBox 3"/>
+          <p:cNvSpPr txBox="1"/>
+          <p:nvPr/>
+        </p:nvSpPr>
+        <p:spPr>
+          <a:xfrm>
+            <a:off x="640080" y="4128516"/>
+            <a:ext cx="10911535" cy="310896"/>
+          </a:xfrm>
+          <a:prstGeom prst="rect">
+            <a:avLst/>
+          </a:prstGeom>
+          <a:noFill/>
+        </p:spPr>
+        <p:txBody>
+          <a:bodyPr wrap="square">
+            <a:spAutoFit/>
+          </a:bodyPr>
+          <a:lstStyle/>
+          <a:p>
+            <a:pPr algn="ctr"/>
+            <a:r>
+              <a:rPr sz="2000" b="0" i="0">
+                <a:solidFill>
+                  <a:srgbClr val="828282"/>
                 </a:solidFill>
                 <a:latin typeface="Arial"/>
               </a:rPr>
@@ -5151,66 +4976,31 @@
       </p:sp>
       <p:sp>
         <p:nvSpPr>
-          <p:cNvPr id="4" name="TextBox 3"/>
-          <p:cNvSpPr txBox="1"/>
-          <p:nvPr/>
-        </p:nvSpPr>
-        <p:spPr>
-          <a:xfrm>
-            <a:off x="594360" y="3529584"/>
-            <a:ext cx="11002975" cy="685800"/>
-          </a:xfrm>
-          <a:prstGeom prst="rect">
-            <a:avLst/>
-          </a:prstGeom>
-          <a:noFill/>
-        </p:spPr>
-        <p:txBody>
-          <a:bodyPr wrap="square">
-            <a:spAutoFit/>
-          </a:bodyPr>
-          <a:lstStyle/>
-          <a:p>
-            <a:pPr algn="ctr"/>
-            <a:r>
-              <a:rPr sz="3805" b="1" i="0">
-                <a:solidFill>
-                  <a:srgbClr val="FFFFFF"/>
-                </a:solidFill>
-                <a:latin typeface="Arial"/>
-              </a:rPr>
-              <a:t>Quando tudo mais cede e vai se embora</a:t>
-            </a:r>
-          </a:p>
-        </p:txBody>
-      </p:sp>
-      <p:sp>
-        <p:nvSpPr>
           <p:cNvPr id="5" name="TextBox 4"/>
           <p:cNvSpPr txBox="1"/>
           <p:nvPr/>
         </p:nvSpPr>
         <p:spPr>
           <a:xfrm>
-            <a:off x="594360" y="4251960"/>
-            <a:ext cx="11002975" cy="347472"/>
-          </a:xfrm>
-          <a:prstGeom prst="rect">
-            <a:avLst/>
-          </a:prstGeom>
-          <a:noFill/>
-        </p:spPr>
-        <p:txBody>
-          <a:bodyPr wrap="square">
-            <a:spAutoFit/>
-          </a:bodyPr>
-          <a:lstStyle/>
-          <a:p>
-            <a:pPr algn="ctr"/>
-            <a:r>
-              <a:rPr sz="2200" b="0" i="1">
-                <a:solidFill>
-                  <a:srgbClr val="8C8C8C"/>
+            <a:off x="640080" y="4494276"/>
+            <a:ext cx="10911535" cy="310896"/>
+          </a:xfrm>
+          <a:prstGeom prst="rect">
+            <a:avLst/>
+          </a:prstGeom>
+          <a:noFill/>
+        </p:spPr>
+        <p:txBody>
+          <a:bodyPr wrap="square">
+            <a:spAutoFit/>
+          </a:bodyPr>
+          <a:lstStyle/>
+          <a:p>
+            <a:pPr algn="ctr"/>
+            <a:r>
+              <a:rPr sz="2000" b="0" i="0">
+                <a:solidFill>
+                  <a:srgbClr val="828282"/>
                 </a:solidFill>
                 <a:latin typeface="Arial"/>
               </a:rPr>
@@ -5253,23 +5043,23 @@
         </p:nvSpPr>
         <p:spPr>
           <a:xfrm>
-            <a:off x="594360" y="2258568"/>
-            <a:ext cx="11002975" cy="685800"/>
-          </a:xfrm>
-          <a:prstGeom prst="rect">
-            <a:avLst/>
-          </a:prstGeom>
-          <a:noFill/>
-        </p:spPr>
-        <p:txBody>
-          <a:bodyPr wrap="square">
-            <a:spAutoFit/>
-          </a:bodyPr>
-          <a:lstStyle/>
-          <a:p>
-            <a:pPr algn="ctr"/>
-            <a:r>
-              <a:rPr sz="3805" b="1" i="0">
+            <a:off x="640080" y="2052828"/>
+            <a:ext cx="10911535" cy="731520"/>
+          </a:xfrm>
+          <a:prstGeom prst="rect">
+            <a:avLst/>
+          </a:prstGeom>
+          <a:noFill/>
+        </p:spPr>
+        <p:txBody>
+          <a:bodyPr wrap="square">
+            <a:spAutoFit/>
+          </a:bodyPr>
+          <a:lstStyle/>
+          <a:p>
+            <a:pPr algn="ctr"/>
+            <a:r>
+              <a:rPr sz="4100" b="1" i="0">
                 <a:solidFill>
                   <a:srgbClr val="FFFFFF"/>
                 </a:solidFill>
@@ -5288,29 +5078,29 @@
         </p:nvSpPr>
         <p:spPr>
           <a:xfrm>
-            <a:off x="594360" y="2980944"/>
-            <a:ext cx="11002975" cy="347472"/>
-          </a:xfrm>
-          <a:prstGeom prst="rect">
-            <a:avLst/>
-          </a:prstGeom>
-          <a:noFill/>
-        </p:spPr>
-        <p:txBody>
-          <a:bodyPr wrap="square">
-            <a:spAutoFit/>
-          </a:bodyPr>
-          <a:lstStyle/>
-          <a:p>
-            <a:pPr algn="ctr"/>
-            <a:r>
-              <a:rPr sz="2200" b="0" i="1">
-                <a:solidFill>
-                  <a:srgbClr val="8C8C8C"/>
-                </a:solidFill>
-                <a:latin typeface="Arial"/>
-              </a:rPr>
-              <a:t/>
+            <a:off x="640080" y="2985516"/>
+            <a:ext cx="10911535" cy="731520"/>
+          </a:xfrm>
+          <a:prstGeom prst="rect">
+            <a:avLst/>
+          </a:prstGeom>
+          <a:noFill/>
+        </p:spPr>
+        <p:txBody>
+          <a:bodyPr wrap="square">
+            <a:spAutoFit/>
+          </a:bodyPr>
+          <a:lstStyle/>
+          <a:p>
+            <a:pPr algn="ctr"/>
+            <a:r>
+              <a:rPr sz="4800" b="1" i="0">
+                <a:solidFill>
+                  <a:srgbClr val="FFFFFF"/>
+                </a:solidFill>
+                <a:latin typeface="Arial"/>
+              </a:rPr>
+              <a:t>Mas totalmente em nome de Jesus</a:t>
             </a:r>
           </a:p>
         </p:txBody>
@@ -5323,29 +5113,29 @@
         </p:nvSpPr>
         <p:spPr>
           <a:xfrm>
-            <a:off x="594360" y="3529584"/>
-            <a:ext cx="11002975" cy="685800"/>
-          </a:xfrm>
-          <a:prstGeom prst="rect">
-            <a:avLst/>
-          </a:prstGeom>
-          <a:noFill/>
-        </p:spPr>
-        <p:txBody>
-          <a:bodyPr wrap="square">
-            <a:spAutoFit/>
-          </a:bodyPr>
-          <a:lstStyle/>
-          <a:p>
-            <a:pPr algn="ctr"/>
-            <a:r>
-              <a:rPr sz="4400" b="1" i="0">
-                <a:solidFill>
-                  <a:srgbClr val="FFFFFF"/>
-                </a:solidFill>
-                <a:latin typeface="Arial"/>
-              </a:rPr>
-              <a:t>Mas totalmente em nome de Jesus</a:t>
+            <a:off x="640080" y="4128516"/>
+            <a:ext cx="10911535" cy="310896"/>
+          </a:xfrm>
+          <a:prstGeom prst="rect">
+            <a:avLst/>
+          </a:prstGeom>
+          <a:noFill/>
+        </p:spPr>
+        <p:txBody>
+          <a:bodyPr wrap="square">
+            <a:spAutoFit/>
+          </a:bodyPr>
+          <a:lstStyle/>
+          <a:p>
+            <a:pPr algn="ctr"/>
+            <a:r>
+              <a:rPr sz="2000" b="0" i="0">
+                <a:solidFill>
+                  <a:srgbClr val="828282"/>
+                </a:solidFill>
+                <a:latin typeface="Arial"/>
+              </a:rPr>
+              <a:t>私の望みは　主の義と血にあり</a:t>
             </a:r>
           </a:p>
         </p:txBody>
@@ -5358,29 +5148,29 @@
         </p:nvSpPr>
         <p:spPr>
           <a:xfrm>
-            <a:off x="594360" y="4251960"/>
-            <a:ext cx="11002975" cy="347472"/>
-          </a:xfrm>
-          <a:prstGeom prst="rect">
-            <a:avLst/>
-          </a:prstGeom>
-          <a:noFill/>
-        </p:spPr>
-        <p:txBody>
-          <a:bodyPr wrap="square">
-            <a:spAutoFit/>
-          </a:bodyPr>
-          <a:lstStyle/>
-          <a:p>
-            <a:pPr algn="ctr"/>
-            <a:r>
-              <a:rPr sz="2200" b="0" i="1">
-                <a:solidFill>
-                  <a:srgbClr val="8C8C8C"/>
-                </a:solidFill>
-                <a:latin typeface="Arial"/>
-              </a:rPr>
-              <a:t/>
+            <a:off x="640080" y="4494276"/>
+            <a:ext cx="10911535" cy="310896"/>
+          </a:xfrm>
+          <a:prstGeom prst="rect">
+            <a:avLst/>
+          </a:prstGeom>
+          <a:noFill/>
+        </p:spPr>
+        <p:txBody>
+          <a:bodyPr wrap="square">
+            <a:spAutoFit/>
+          </a:bodyPr>
+          <a:lstStyle/>
+          <a:p>
+            <a:pPr algn="ctr"/>
+            <a:r>
+              <a:rPr sz="2000" b="0" i="0">
+                <a:solidFill>
+                  <a:srgbClr val="828282"/>
+                </a:solidFill>
+                <a:latin typeface="Arial"/>
+              </a:rPr>
+              <a:t>主イエスのほかには　  頼れるものなし</a:t>
             </a:r>
           </a:p>
         </p:txBody>
@@ -5419,23 +5209,23 @@
         </p:nvSpPr>
         <p:spPr>
           <a:xfrm>
-            <a:off x="594360" y="2258568"/>
-            <a:ext cx="11002975" cy="685800"/>
-          </a:xfrm>
-          <a:prstGeom prst="rect">
-            <a:avLst/>
-          </a:prstGeom>
-          <a:noFill/>
-        </p:spPr>
-        <p:txBody>
-          <a:bodyPr wrap="square">
-            <a:spAutoFit/>
-          </a:bodyPr>
-          <a:lstStyle/>
-          <a:p>
-            <a:pPr algn="ctr"/>
-            <a:r>
-              <a:rPr sz="4400" b="1" i="0">
+            <a:off x="640080" y="2052828"/>
+            <a:ext cx="10911535" cy="731520"/>
+          </a:xfrm>
+          <a:prstGeom prst="rect">
+            <a:avLst/>
+          </a:prstGeom>
+          <a:noFill/>
+        </p:spPr>
+        <p:txBody>
+          <a:bodyPr wrap="square">
+            <a:spAutoFit/>
+          </a:bodyPr>
+          <a:lstStyle/>
+          <a:p>
+            <a:pPr algn="ctr"/>
+            <a:r>
+              <a:rPr sz="4800" b="1" i="0">
                 <a:solidFill>
                   <a:srgbClr val="FFFFFF"/>
                 </a:solidFill>
@@ -5454,99 +5244,29 @@
         </p:nvSpPr>
         <p:spPr>
           <a:xfrm>
-            <a:off x="594360" y="2980944"/>
-            <a:ext cx="11002975" cy="347472"/>
-          </a:xfrm>
-          <a:prstGeom prst="rect">
-            <a:avLst/>
-          </a:prstGeom>
-          <a:noFill/>
-        </p:spPr>
-        <p:txBody>
-          <a:bodyPr wrap="square">
-            <a:spAutoFit/>
-          </a:bodyPr>
-          <a:lstStyle/>
-          <a:p>
-            <a:pPr algn="ctr"/>
-            <a:r>
-              <a:rPr sz="2200" b="0" i="1">
-                <a:solidFill>
-                  <a:srgbClr val="8C8C8C"/>
-                </a:solidFill>
-                <a:latin typeface="Arial"/>
-              </a:rPr>
-              <a:t/>
-            </a:r>
-          </a:p>
-        </p:txBody>
-      </p:sp>
-      <p:sp>
-        <p:nvSpPr>
-          <p:cNvPr id="4" name="TextBox 3"/>
-          <p:cNvSpPr txBox="1"/>
-          <p:nvPr/>
-        </p:nvSpPr>
-        <p:spPr>
-          <a:xfrm>
-            <a:off x="594360" y="3529584"/>
-            <a:ext cx="11002975" cy="685800"/>
-          </a:xfrm>
-          <a:prstGeom prst="rect">
-            <a:avLst/>
-          </a:prstGeom>
-          <a:noFill/>
-        </p:spPr>
-        <p:txBody>
-          <a:bodyPr wrap="square">
-            <a:spAutoFit/>
-          </a:bodyPr>
-          <a:lstStyle/>
-          <a:p>
-            <a:pPr algn="ctr"/>
-            <a:r>
-              <a:rPr sz="4400" b="1" i="0">
+            <a:off x="640080" y="2985516"/>
+            <a:ext cx="10911535" cy="731520"/>
+          </a:xfrm>
+          <a:prstGeom prst="rect">
+            <a:avLst/>
+          </a:prstGeom>
+          <a:noFill/>
+        </p:spPr>
+        <p:txBody>
+          <a:bodyPr wrap="square">
+            <a:spAutoFit/>
+          </a:bodyPr>
+          <a:lstStyle/>
+          <a:p>
+            <a:pPr algn="ctr"/>
+            <a:r>
+              <a:rPr sz="4800" b="1" i="0">
                 <a:solidFill>
                   <a:srgbClr val="FFFFFF"/>
                 </a:solidFill>
                 <a:latin typeface="Arial"/>
               </a:rPr>
               <a:t>Todo outro chão é areia movediça</a:t>
-            </a:r>
-          </a:p>
-        </p:txBody>
-      </p:sp>
-      <p:sp>
-        <p:nvSpPr>
-          <p:cNvPr id="5" name="TextBox 4"/>
-          <p:cNvSpPr txBox="1"/>
-          <p:nvPr/>
-        </p:nvSpPr>
-        <p:spPr>
-          <a:xfrm>
-            <a:off x="594360" y="4251960"/>
-            <a:ext cx="11002975" cy="347472"/>
-          </a:xfrm>
-          <a:prstGeom prst="rect">
-            <a:avLst/>
-          </a:prstGeom>
-          <a:noFill/>
-        </p:spPr>
-        <p:txBody>
-          <a:bodyPr wrap="square">
-            <a:spAutoFit/>
-          </a:bodyPr>
-          <a:lstStyle/>
-          <a:p>
-            <a:pPr algn="ctr"/>
-            <a:r>
-              <a:rPr sz="2200" b="0" i="1">
-                <a:solidFill>
-                  <a:srgbClr val="8C8C8C"/>
-                </a:solidFill>
-                <a:latin typeface="Arial"/>
-              </a:rPr>
-              <a:t/>
             </a:r>
           </a:p>
         </p:txBody>
@@ -5585,23 +5305,23 @@
         </p:nvSpPr>
         <p:spPr>
           <a:xfrm>
-            <a:off x="594360" y="1837944"/>
-            <a:ext cx="11002975" cy="685800"/>
-          </a:xfrm>
-          <a:prstGeom prst="rect">
-            <a:avLst/>
-          </a:prstGeom>
-          <a:noFill/>
-        </p:spPr>
-        <p:txBody>
-          <a:bodyPr wrap="square">
-            <a:spAutoFit/>
-          </a:bodyPr>
-          <a:lstStyle/>
-          <a:p>
-            <a:pPr algn="ctr"/>
-            <a:r>
-              <a:rPr sz="4400" b="1" i="0">
+            <a:off x="640080" y="1650492"/>
+            <a:ext cx="10911535" cy="731520"/>
+          </a:xfrm>
+          <a:prstGeom prst="rect">
+            <a:avLst/>
+          </a:prstGeom>
+          <a:noFill/>
+        </p:spPr>
+        <p:txBody>
+          <a:bodyPr wrap="square">
+            <a:spAutoFit/>
+          </a:bodyPr>
+          <a:lstStyle/>
+          <a:p>
+            <a:pPr algn="ctr"/>
+            <a:r>
+              <a:rPr sz="4800" b="1" i="0">
                 <a:solidFill>
                   <a:srgbClr val="FFFFFF"/>
                 </a:solidFill>
@@ -5620,25 +5340,25 @@
         </p:nvSpPr>
         <p:spPr>
           <a:xfrm>
-            <a:off x="594360" y="2560320"/>
-            <a:ext cx="11002975" cy="384048"/>
-          </a:xfrm>
-          <a:prstGeom prst="rect">
-            <a:avLst/>
-          </a:prstGeom>
-          <a:noFill/>
-        </p:spPr>
-        <p:txBody>
-          <a:bodyPr wrap="square">
-            <a:spAutoFit/>
-          </a:bodyPr>
-          <a:lstStyle/>
-          <a:p>
-            <a:pPr algn="ctr"/>
-            <a:r>
-              <a:rPr sz="2240" b="0" i="1">
-                <a:solidFill>
-                  <a:srgbClr val="B4B4B4"/>
+            <a:off x="640080" y="2418588"/>
+            <a:ext cx="10911535" cy="365760"/>
+          </a:xfrm>
+          <a:prstGeom prst="rect">
+            <a:avLst/>
+          </a:prstGeom>
+          <a:noFill/>
+        </p:spPr>
+        <p:txBody>
+          <a:bodyPr wrap="square">
+            <a:spAutoFit/>
+          </a:bodyPr>
+          <a:lstStyle/>
+          <a:p>
+            <a:pPr algn="ctr"/>
+            <a:r>
+              <a:rPr sz="2400" b="0" i="1">
+                <a:solidFill>
+                  <a:srgbClr val="AAAAAA"/>
                 </a:solidFill>
                 <a:latin typeface="Arial"/>
               </a:rPr>
@@ -5655,8 +5375,78 @@
         </p:nvSpPr>
         <p:spPr>
           <a:xfrm>
-            <a:off x="594360" y="2980944"/>
-            <a:ext cx="11002975" cy="347472"/>
+            <a:off x="640080" y="2985516"/>
+            <a:ext cx="10911535" cy="731520"/>
+          </a:xfrm>
+          <a:prstGeom prst="rect">
+            <a:avLst/>
+          </a:prstGeom>
+          <a:noFill/>
+        </p:spPr>
+        <p:txBody>
+          <a:bodyPr wrap="square">
+            <a:spAutoFit/>
+          </a:bodyPr>
+          <a:lstStyle/>
+          <a:p>
+            <a:pPr algn="ctr"/>
+            <a:r>
+              <a:rPr sz="4800" b="1" i="0">
+                <a:solidFill>
+                  <a:srgbClr val="FFFFFF"/>
+                </a:solidFill>
+                <a:latin typeface="Arial"/>
+              </a:rPr>
+              <a:t>主イエスのほかには　  頼れるものなし</a:t>
+            </a:r>
+          </a:p>
+        </p:txBody>
+      </p:sp>
+      <p:sp>
+        <p:nvSpPr>
+          <p:cNvPr id="5" name="TextBox 4"/>
+          <p:cNvSpPr txBox="1"/>
+          <p:nvPr/>
+        </p:nvSpPr>
+        <p:spPr>
+          <a:xfrm>
+            <a:off x="640080" y="3753612"/>
+            <a:ext cx="10911535" cy="365760"/>
+          </a:xfrm>
+          <a:prstGeom prst="rect">
+            <a:avLst/>
+          </a:prstGeom>
+          <a:noFill/>
+        </p:spPr>
+        <p:txBody>
+          <a:bodyPr wrap="square">
+            <a:spAutoFit/>
+          </a:bodyPr>
+          <a:lstStyle/>
+          <a:p>
+            <a:pPr algn="ctr"/>
+            <a:r>
+              <a:rPr sz="2400" b="0" i="1">
+                <a:solidFill>
+                  <a:srgbClr val="AAAAAA"/>
+                </a:solidFill>
+                <a:latin typeface="Arial"/>
+              </a:rPr>
+              <a:t>shu iesu no hokani wa tayoreru mono nashi</a:t>
+            </a:r>
+          </a:p>
+        </p:txBody>
+      </p:sp>
+      <p:sp>
+        <p:nvSpPr>
+          <p:cNvPr id="6" name="TextBox 5"/>
+          <p:cNvSpPr txBox="1"/>
+          <p:nvPr/>
+        </p:nvSpPr>
+        <p:spPr>
+          <a:xfrm>
+            <a:off x="640080" y="4530852"/>
+            <a:ext cx="10911535" cy="310896"/>
           </a:xfrm>
           <a:prstGeom prst="rect">
             <a:avLst/>
@@ -5673,81 +5463,11 @@
             <a:r>
               <a:rPr sz="2000" b="0" i="1">
                 <a:solidFill>
-                  <a:srgbClr val="8C8C8C"/>
-                </a:solidFill>
-                <a:latin typeface="Arial"/>
-              </a:rPr>
-              <a:t/>
-            </a:r>
-          </a:p>
-        </p:txBody>
-      </p:sp>
-      <p:sp>
-        <p:nvSpPr>
-          <p:cNvPr id="5" name="TextBox 4"/>
-          <p:cNvSpPr txBox="1"/>
-          <p:nvPr/>
-        </p:nvSpPr>
-        <p:spPr>
-          <a:xfrm>
-            <a:off x="594360" y="3529584"/>
-            <a:ext cx="11002975" cy="685800"/>
-          </a:xfrm>
-          <a:prstGeom prst="rect">
-            <a:avLst/>
-          </a:prstGeom>
-          <a:noFill/>
-        </p:spPr>
-        <p:txBody>
-          <a:bodyPr wrap="square">
-            <a:spAutoFit/>
-          </a:bodyPr>
-          <a:lstStyle/>
-          <a:p>
-            <a:pPr algn="ctr"/>
-            <a:r>
-              <a:rPr sz="4400" b="1" i="0">
-                <a:solidFill>
-                  <a:srgbClr val="FFFFFF"/>
-                </a:solidFill>
-                <a:latin typeface="Arial"/>
-              </a:rPr>
-              <a:t>主イエスのほかには　  頼れるものなし</a:t>
-            </a:r>
-          </a:p>
-        </p:txBody>
-      </p:sp>
-      <p:sp>
-        <p:nvSpPr>
-          <p:cNvPr id="6" name="TextBox 5"/>
-          <p:cNvSpPr txBox="1"/>
-          <p:nvPr/>
-        </p:nvSpPr>
-        <p:spPr>
-          <a:xfrm>
-            <a:off x="594360" y="4251960"/>
-            <a:ext cx="11002975" cy="384048"/>
-          </a:xfrm>
-          <a:prstGeom prst="rect">
-            <a:avLst/>
-          </a:prstGeom>
-          <a:noFill/>
-        </p:spPr>
-        <p:txBody>
-          <a:bodyPr wrap="square">
-            <a:spAutoFit/>
-          </a:bodyPr>
-          <a:lstStyle/>
-          <a:p>
-            <a:pPr algn="ctr"/>
-            <a:r>
-              <a:rPr sz="2400" b="0" i="1">
-                <a:solidFill>
-                  <a:srgbClr val="B4B4B4"/>
-                </a:solidFill>
-                <a:latin typeface="Arial"/>
-              </a:rPr>
-              <a:t>shu iesu no hokani wa tayoreru mono nashi</a:t>
+                  <a:srgbClr val="828282"/>
+                </a:solidFill>
+                <a:latin typeface="Arial"/>
+              </a:rPr>
+              <a:t>Não ouso confiar na mais doce bondade</a:t>
             </a:r>
           </a:p>
         </p:txBody>
@@ -5760,8 +5480,8 @@
         </p:nvSpPr>
         <p:spPr>
           <a:xfrm>
-            <a:off x="594360" y="4672584"/>
-            <a:ext cx="11002975" cy="347472"/>
+            <a:off x="640080" y="4896612"/>
+            <a:ext cx="10911535" cy="310896"/>
           </a:xfrm>
           <a:prstGeom prst="rect">
             <a:avLst/>
@@ -5778,11 +5498,11 @@
             <a:r>
               <a:rPr sz="2000" b="0" i="1">
                 <a:solidFill>
-                  <a:srgbClr val="8C8C8C"/>
-                </a:solidFill>
-                <a:latin typeface="Arial"/>
-              </a:rPr>
-              <a:t/>
+                  <a:srgbClr val="828282"/>
+                </a:solidFill>
+                <a:latin typeface="Arial"/>
+              </a:rPr>
+              <a:t>Mas totalmente em nome de Jesus</a:t>
             </a:r>
           </a:p>
         </p:txBody>
@@ -5821,23 +5541,23 @@
         </p:nvSpPr>
         <p:spPr>
           <a:xfrm>
-            <a:off x="594360" y="1837944"/>
-            <a:ext cx="11002975" cy="685800"/>
-          </a:xfrm>
-          <a:prstGeom prst="rect">
-            <a:avLst/>
-          </a:prstGeom>
-          <a:noFill/>
-        </p:spPr>
-        <p:txBody>
-          <a:bodyPr wrap="square">
-            <a:spAutoFit/>
-          </a:bodyPr>
-          <a:lstStyle/>
-          <a:p>
-            <a:pPr algn="ctr"/>
-            <a:r>
-              <a:rPr sz="4400" b="1" i="0">
+            <a:off x="640080" y="1650492"/>
+            <a:ext cx="10911535" cy="731520"/>
+          </a:xfrm>
+          <a:prstGeom prst="rect">
+            <a:avLst/>
+          </a:prstGeom>
+          <a:noFill/>
+        </p:spPr>
+        <p:txBody>
+          <a:bodyPr wrap="square">
+            <a:spAutoFit/>
+          </a:bodyPr>
+          <a:lstStyle/>
+          <a:p>
+            <a:pPr algn="ctr"/>
+            <a:r>
+              <a:rPr sz="4800" b="1" i="0">
                 <a:solidFill>
                   <a:srgbClr val="FFFFFF"/>
                 </a:solidFill>
@@ -5856,8 +5576,8 @@
         </p:nvSpPr>
         <p:spPr>
           <a:xfrm>
-            <a:off x="594360" y="2560320"/>
-            <a:ext cx="11002975" cy="384048"/>
+            <a:off x="640080" y="2418588"/>
+            <a:ext cx="10911535" cy="365760"/>
           </a:xfrm>
           <a:prstGeom prst="rect">
             <a:avLst/>
@@ -5874,7 +5594,7 @@
             <a:r>
               <a:rPr sz="2400" b="0" i="1">
                 <a:solidFill>
-                  <a:srgbClr val="B4B4B4"/>
+                  <a:srgbClr val="AAAAAA"/>
                 </a:solidFill>
                 <a:latin typeface="Arial"/>
               </a:rPr>
@@ -5891,8 +5611,78 @@
         </p:nvSpPr>
         <p:spPr>
           <a:xfrm>
-            <a:off x="594360" y="2980944"/>
-            <a:ext cx="11002975" cy="347472"/>
+            <a:off x="640080" y="2985516"/>
+            <a:ext cx="10911535" cy="731520"/>
+          </a:xfrm>
+          <a:prstGeom prst="rect">
+            <a:avLst/>
+          </a:prstGeom>
+          <a:noFill/>
+        </p:spPr>
+        <p:txBody>
+          <a:bodyPr wrap="square">
+            <a:spAutoFit/>
+          </a:bodyPr>
+          <a:lstStyle/>
+          <a:p>
+            <a:pPr algn="ctr"/>
+            <a:r>
+              <a:rPr sz="4800" b="1" i="0">
+                <a:solidFill>
+                  <a:srgbClr val="FFFFFF"/>
+                </a:solidFill>
+                <a:latin typeface="Arial"/>
+              </a:rPr>
+              <a:t>揺るがぬいしずえ</a:t>
+            </a:r>
+          </a:p>
+        </p:txBody>
+      </p:sp>
+      <p:sp>
+        <p:nvSpPr>
+          <p:cNvPr id="5" name="TextBox 4"/>
+          <p:cNvSpPr txBox="1"/>
+          <p:nvPr/>
+        </p:nvSpPr>
+        <p:spPr>
+          <a:xfrm>
+            <a:off x="640080" y="3753612"/>
+            <a:ext cx="10911535" cy="365760"/>
+          </a:xfrm>
+          <a:prstGeom prst="rect">
+            <a:avLst/>
+          </a:prstGeom>
+          <a:noFill/>
+        </p:spPr>
+        <p:txBody>
+          <a:bodyPr wrap="square">
+            <a:spAutoFit/>
+          </a:bodyPr>
+          <a:lstStyle/>
+          <a:p>
+            <a:pPr algn="ctr"/>
+            <a:r>
+              <a:rPr sz="2400" b="0" i="1">
+                <a:solidFill>
+                  <a:srgbClr val="AAAAAA"/>
+                </a:solidFill>
+                <a:latin typeface="Arial"/>
+              </a:rPr>
+              <a:t>yuru ga nuishizue</a:t>
+            </a:r>
+          </a:p>
+        </p:txBody>
+      </p:sp>
+      <p:sp>
+        <p:nvSpPr>
+          <p:cNvPr id="6" name="TextBox 5"/>
+          <p:cNvSpPr txBox="1"/>
+          <p:nvPr/>
+        </p:nvSpPr>
+        <p:spPr>
+          <a:xfrm>
+            <a:off x="640080" y="4530852"/>
+            <a:ext cx="10911535" cy="310896"/>
           </a:xfrm>
           <a:prstGeom prst="rect">
             <a:avLst/>
@@ -5909,7 +5699,7 @@
             <a:r>
               <a:rPr sz="2000" b="0" i="1">
                 <a:solidFill>
-                  <a:srgbClr val="8C8C8C"/>
+                  <a:srgbClr val="828282"/>
                 </a:solidFill>
                 <a:latin typeface="Arial"/>
               </a:rPr>
@@ -5920,84 +5710,14 @@
       </p:sp>
       <p:sp>
         <p:nvSpPr>
-          <p:cNvPr id="5" name="TextBox 4"/>
-          <p:cNvSpPr txBox="1"/>
-          <p:nvPr/>
-        </p:nvSpPr>
-        <p:spPr>
-          <a:xfrm>
-            <a:off x="594360" y="3529584"/>
-            <a:ext cx="11002975" cy="685800"/>
-          </a:xfrm>
-          <a:prstGeom prst="rect">
-            <a:avLst/>
-          </a:prstGeom>
-          <a:noFill/>
-        </p:spPr>
-        <p:txBody>
-          <a:bodyPr wrap="square">
-            <a:spAutoFit/>
-          </a:bodyPr>
-          <a:lstStyle/>
-          <a:p>
-            <a:pPr algn="ctr"/>
-            <a:r>
-              <a:rPr sz="4400" b="1" i="0">
-                <a:solidFill>
-                  <a:srgbClr val="FFFFFF"/>
-                </a:solidFill>
-                <a:latin typeface="Arial"/>
-              </a:rPr>
-              <a:t>揺るがぬいしずえ</a:t>
-            </a:r>
-          </a:p>
-        </p:txBody>
-      </p:sp>
-      <p:sp>
-        <p:nvSpPr>
-          <p:cNvPr id="6" name="TextBox 5"/>
-          <p:cNvSpPr txBox="1"/>
-          <p:nvPr/>
-        </p:nvSpPr>
-        <p:spPr>
-          <a:xfrm>
-            <a:off x="594360" y="4251960"/>
-            <a:ext cx="11002975" cy="384048"/>
-          </a:xfrm>
-          <a:prstGeom prst="rect">
-            <a:avLst/>
-          </a:prstGeom>
-          <a:noFill/>
-        </p:spPr>
-        <p:txBody>
-          <a:bodyPr wrap="square">
-            <a:spAutoFit/>
-          </a:bodyPr>
-          <a:lstStyle/>
-          <a:p>
-            <a:pPr algn="ctr"/>
-            <a:r>
-              <a:rPr sz="2400" b="0" i="1">
-                <a:solidFill>
-                  <a:srgbClr val="B4B4B4"/>
-                </a:solidFill>
-                <a:latin typeface="Arial"/>
-              </a:rPr>
-              <a:t>yuru ga nuishizue</a:t>
-            </a:r>
-          </a:p>
-        </p:txBody>
-      </p:sp>
-      <p:sp>
-        <p:nvSpPr>
           <p:cNvPr id="7" name="TextBox 6"/>
           <p:cNvSpPr txBox="1"/>
           <p:nvPr/>
         </p:nvSpPr>
         <p:spPr>
           <a:xfrm>
-            <a:off x="594360" y="4672584"/>
-            <a:ext cx="11002975" cy="347472"/>
+            <a:off x="640080" y="4896612"/>
+            <a:ext cx="10911535" cy="310896"/>
           </a:xfrm>
           <a:prstGeom prst="rect">
             <a:avLst/>
@@ -6014,7 +5734,7 @@
             <a:r>
               <a:rPr sz="2000" b="0" i="1">
                 <a:solidFill>
-                  <a:srgbClr val="8C8C8C"/>
+                  <a:srgbClr val="828282"/>
                 </a:solidFill>
                 <a:latin typeface="Arial"/>
               </a:rPr>
@@ -6057,23 +5777,23 @@
         </p:nvSpPr>
         <p:spPr>
           <a:xfrm>
-            <a:off x="594360" y="1837944"/>
-            <a:ext cx="11002975" cy="685800"/>
-          </a:xfrm>
-          <a:prstGeom prst="rect">
-            <a:avLst/>
-          </a:prstGeom>
-          <a:noFill/>
-        </p:spPr>
-        <p:txBody>
-          <a:bodyPr wrap="square">
-            <a:spAutoFit/>
-          </a:bodyPr>
-          <a:lstStyle/>
-          <a:p>
-            <a:pPr algn="ctr"/>
-            <a:r>
-              <a:rPr sz="4400" b="1" i="0">
+            <a:off x="640080" y="1650492"/>
+            <a:ext cx="10911535" cy="731520"/>
+          </a:xfrm>
+          <a:prstGeom prst="rect">
+            <a:avLst/>
+          </a:prstGeom>
+          <a:noFill/>
+        </p:spPr>
+        <p:txBody>
+          <a:bodyPr wrap="square">
+            <a:spAutoFit/>
+          </a:bodyPr>
+          <a:lstStyle/>
+          <a:p>
+            <a:pPr algn="ctr"/>
+            <a:r>
+              <a:rPr sz="4800" b="1" i="0">
                 <a:solidFill>
                   <a:srgbClr val="FFFFFF"/>
                 </a:solidFill>
@@ -6092,8 +5812,8 @@
         </p:nvSpPr>
         <p:spPr>
           <a:xfrm>
-            <a:off x="594360" y="2560320"/>
-            <a:ext cx="11002975" cy="384048"/>
+            <a:off x="640080" y="2418588"/>
+            <a:ext cx="10911535" cy="365760"/>
           </a:xfrm>
           <a:prstGeom prst="rect">
             <a:avLst/>
@@ -6110,7 +5830,7 @@
             <a:r>
               <a:rPr sz="2400" b="0" i="1">
                 <a:solidFill>
-                  <a:srgbClr val="B4B4B4"/>
+                  <a:srgbClr val="AAAAAA"/>
                 </a:solidFill>
                 <a:latin typeface="Arial"/>
               </a:rPr>
@@ -6127,8 +5847,78 @@
         </p:nvSpPr>
         <p:spPr>
           <a:xfrm>
-            <a:off x="594360" y="2980944"/>
-            <a:ext cx="11002975" cy="347472"/>
+            <a:off x="640080" y="2985516"/>
+            <a:ext cx="10911535" cy="731520"/>
+          </a:xfrm>
+          <a:prstGeom prst="rect">
+            <a:avLst/>
+          </a:prstGeom>
+          <a:noFill/>
+        </p:spPr>
+        <p:txBody>
+          <a:bodyPr wrap="square">
+            <a:spAutoFit/>
+          </a:bodyPr>
+          <a:lstStyle/>
+          <a:p>
+            <a:pPr algn="ctr"/>
+            <a:r>
+              <a:rPr sz="4800" b="1" i="0">
+                <a:solidFill>
+                  <a:srgbClr val="FFFFFF"/>
+                </a:solidFill>
+                <a:latin typeface="Arial"/>
+              </a:rPr>
+              <a:t>錨をおろして　みもとに休らう</a:t>
+            </a:r>
+          </a:p>
+        </p:txBody>
+      </p:sp>
+      <p:sp>
+        <p:nvSpPr>
+          <p:cNvPr id="5" name="TextBox 4"/>
+          <p:cNvSpPr txBox="1"/>
+          <p:nvPr/>
+        </p:nvSpPr>
+        <p:spPr>
+          <a:xfrm>
+            <a:off x="640080" y="3753612"/>
+            <a:ext cx="10911535" cy="365760"/>
+          </a:xfrm>
+          <a:prstGeom prst="rect">
+            <a:avLst/>
+          </a:prstGeom>
+          <a:noFill/>
+        </p:spPr>
+        <p:txBody>
+          <a:bodyPr wrap="square">
+            <a:spAutoFit/>
+          </a:bodyPr>
+          <a:lstStyle/>
+          <a:p>
+            <a:pPr algn="ctr"/>
+            <a:r>
+              <a:rPr sz="2400" b="0" i="1">
+                <a:solidFill>
+                  <a:srgbClr val="AAAAAA"/>
+                </a:solidFill>
+                <a:latin typeface="Arial"/>
+              </a:rPr>
+              <a:t>ikari wo oroshite mimotoni yasurau</a:t>
+            </a:r>
+          </a:p>
+        </p:txBody>
+      </p:sp>
+      <p:sp>
+        <p:nvSpPr>
+          <p:cNvPr id="6" name="TextBox 5"/>
+          <p:cNvSpPr txBox="1"/>
+          <p:nvPr/>
+        </p:nvSpPr>
+        <p:spPr>
+          <a:xfrm>
+            <a:off x="640080" y="4530852"/>
+            <a:ext cx="10911535" cy="310896"/>
           </a:xfrm>
           <a:prstGeom prst="rect">
             <a:avLst/>
@@ -6145,81 +5935,11 @@
             <a:r>
               <a:rPr sz="2000" b="0" i="1">
                 <a:solidFill>
-                  <a:srgbClr val="8C8C8C"/>
-                </a:solidFill>
-                <a:latin typeface="Arial"/>
-              </a:rPr>
-              <a:t/>
-            </a:r>
-          </a:p>
-        </p:txBody>
-      </p:sp>
-      <p:sp>
-        <p:nvSpPr>
-          <p:cNvPr id="5" name="TextBox 4"/>
-          <p:cNvSpPr txBox="1"/>
-          <p:nvPr/>
-        </p:nvSpPr>
-        <p:spPr>
-          <a:xfrm>
-            <a:off x="594360" y="3529584"/>
-            <a:ext cx="11002975" cy="685800"/>
-          </a:xfrm>
-          <a:prstGeom prst="rect">
-            <a:avLst/>
-          </a:prstGeom>
-          <a:noFill/>
-        </p:spPr>
-        <p:txBody>
-          <a:bodyPr wrap="square">
-            <a:spAutoFit/>
-          </a:bodyPr>
-          <a:lstStyle/>
-          <a:p>
-            <a:pPr algn="ctr"/>
-            <a:r>
-              <a:rPr sz="4400" b="1" i="0">
-                <a:solidFill>
-                  <a:srgbClr val="FFFFFF"/>
-                </a:solidFill>
-                <a:latin typeface="Arial"/>
-              </a:rPr>
-              <a:t>錨をおろして　みもとに休らう</a:t>
-            </a:r>
-          </a:p>
-        </p:txBody>
-      </p:sp>
-      <p:sp>
-        <p:nvSpPr>
-          <p:cNvPr id="6" name="TextBox 5"/>
-          <p:cNvSpPr txBox="1"/>
-          <p:nvPr/>
-        </p:nvSpPr>
-        <p:spPr>
-          <a:xfrm>
-            <a:off x="594360" y="4251960"/>
-            <a:ext cx="11002975" cy="384048"/>
-          </a:xfrm>
-          <a:prstGeom prst="rect">
-            <a:avLst/>
-          </a:prstGeom>
-          <a:noFill/>
-        </p:spPr>
-        <p:txBody>
-          <a:bodyPr wrap="square">
-            <a:spAutoFit/>
-          </a:bodyPr>
-          <a:lstStyle/>
-          <a:p>
-            <a:pPr algn="ctr"/>
-            <a:r>
-              <a:rPr sz="2400" b="0" i="1">
-                <a:solidFill>
-                  <a:srgbClr val="B4B4B4"/>
-                </a:solidFill>
-                <a:latin typeface="Arial"/>
-              </a:rPr>
-              <a:t>ikari wo oroshite mimotoni yasurau</a:t>
+                  <a:srgbClr val="828282"/>
+                </a:solidFill>
+                <a:latin typeface="Arial"/>
+              </a:rPr>
+              <a:t>Não ouso confiar na mais doce bondade</a:t>
             </a:r>
           </a:p>
         </p:txBody>
@@ -6232,8 +5952,8 @@
         </p:nvSpPr>
         <p:spPr>
           <a:xfrm>
-            <a:off x="594360" y="4672584"/>
-            <a:ext cx="11002975" cy="347472"/>
+            <a:off x="640080" y="4896612"/>
+            <a:ext cx="10911535" cy="310896"/>
           </a:xfrm>
           <a:prstGeom prst="rect">
             <a:avLst/>
@@ -6250,11 +5970,11 @@
             <a:r>
               <a:rPr sz="2000" b="0" i="1">
                 <a:solidFill>
-                  <a:srgbClr val="8C8C8C"/>
-                </a:solidFill>
-                <a:latin typeface="Arial"/>
-              </a:rPr>
-              <a:t/>
+                  <a:srgbClr val="828282"/>
+                </a:solidFill>
+                <a:latin typeface="Arial"/>
+              </a:rPr>
+              <a:t>Mas totalmente em nome de Jesus</a:t>
             </a:r>
           </a:p>
         </p:txBody>
@@ -6293,23 +6013,23 @@
         </p:nvSpPr>
         <p:spPr>
           <a:xfrm>
-            <a:off x="594360" y="1837944"/>
-            <a:ext cx="11002975" cy="685800"/>
-          </a:xfrm>
-          <a:prstGeom prst="rect">
-            <a:avLst/>
-          </a:prstGeom>
-          <a:noFill/>
-        </p:spPr>
-        <p:txBody>
-          <a:bodyPr wrap="square">
-            <a:spAutoFit/>
-          </a:bodyPr>
-          <a:lstStyle/>
-          <a:p>
-            <a:pPr algn="ctr"/>
-            <a:r>
-              <a:rPr sz="4400" b="1" i="0">
+            <a:off x="640080" y="1650492"/>
+            <a:ext cx="10911535" cy="731520"/>
+          </a:xfrm>
+          <a:prstGeom prst="rect">
+            <a:avLst/>
+          </a:prstGeom>
+          <a:noFill/>
+        </p:spPr>
+        <p:txBody>
+          <a:bodyPr wrap="square">
+            <a:spAutoFit/>
+          </a:bodyPr>
+          <a:lstStyle/>
+          <a:p>
+            <a:pPr algn="ctr"/>
+            <a:r>
+              <a:rPr sz="4800" b="1" i="0">
                 <a:solidFill>
                   <a:srgbClr val="FFFFFF"/>
                 </a:solidFill>
@@ -6328,8 +6048,8 @@
         </p:nvSpPr>
         <p:spPr>
           <a:xfrm>
-            <a:off x="594360" y="2560320"/>
-            <a:ext cx="11002975" cy="384048"/>
+            <a:off x="640080" y="2418588"/>
+            <a:ext cx="10911535" cy="365760"/>
           </a:xfrm>
           <a:prstGeom prst="rect">
             <a:avLst/>
@@ -6346,7 +6066,7 @@
             <a:r>
               <a:rPr sz="2400" b="0" i="1">
                 <a:solidFill>
-                  <a:srgbClr val="B4B4B4"/>
+                  <a:srgbClr val="AAAAAA"/>
                 </a:solidFill>
                 <a:latin typeface="Arial"/>
               </a:rPr>
@@ -6363,8 +6083,78 @@
         </p:nvSpPr>
         <p:spPr>
           <a:xfrm>
-            <a:off x="594360" y="2980944"/>
-            <a:ext cx="11002975" cy="347472"/>
+            <a:off x="640080" y="2985516"/>
+            <a:ext cx="10911535" cy="731520"/>
+          </a:xfrm>
+          <a:prstGeom prst="rect">
+            <a:avLst/>
+          </a:prstGeom>
+          <a:noFill/>
+        </p:spPr>
+        <p:txBody>
+          <a:bodyPr wrap="square">
+            <a:spAutoFit/>
+          </a:bodyPr>
+          <a:lstStyle/>
+          <a:p>
+            <a:pPr algn="ctr"/>
+            <a:r>
+              <a:rPr sz="4800" b="1" i="0">
+                <a:solidFill>
+                  <a:srgbClr val="FFFFFF"/>
+                </a:solidFill>
+                <a:latin typeface="Arial"/>
+              </a:rPr>
+              <a:t>大水の中にも　          望みは絶えない</a:t>
+            </a:r>
+          </a:p>
+        </p:txBody>
+      </p:sp>
+      <p:sp>
+        <p:nvSpPr>
+          <p:cNvPr id="5" name="TextBox 4"/>
+          <p:cNvSpPr txBox="1"/>
+          <p:nvPr/>
+        </p:nvSpPr>
+        <p:spPr>
+          <a:xfrm>
+            <a:off x="640080" y="3753612"/>
+            <a:ext cx="10911535" cy="365760"/>
+          </a:xfrm>
+          <a:prstGeom prst="rect">
+            <a:avLst/>
+          </a:prstGeom>
+          <a:noFill/>
+        </p:spPr>
+        <p:txBody>
+          <a:bodyPr wrap="square">
+            <a:spAutoFit/>
+          </a:bodyPr>
+          <a:lstStyle/>
+          <a:p>
+            <a:pPr algn="ctr"/>
+            <a:r>
+              <a:rPr sz="2400" b="0" i="1">
+                <a:solidFill>
+                  <a:srgbClr val="AAAAAA"/>
+                </a:solidFill>
+                <a:latin typeface="Arial"/>
+              </a:rPr>
+              <a:t>oomizu no naka ni mo  nozomi wa taenai</a:t>
+            </a:r>
+          </a:p>
+        </p:txBody>
+      </p:sp>
+      <p:sp>
+        <p:nvSpPr>
+          <p:cNvPr id="6" name="TextBox 5"/>
+          <p:cNvSpPr txBox="1"/>
+          <p:nvPr/>
+        </p:nvSpPr>
+        <p:spPr>
+          <a:xfrm>
+            <a:off x="640080" y="4530852"/>
+            <a:ext cx="10911535" cy="310896"/>
           </a:xfrm>
           <a:prstGeom prst="rect">
             <a:avLst/>
@@ -6381,81 +6171,11 @@
             <a:r>
               <a:rPr sz="2000" b="0" i="1">
                 <a:solidFill>
-                  <a:srgbClr val="8C8C8C"/>
-                </a:solidFill>
-                <a:latin typeface="Arial"/>
-              </a:rPr>
-              <a:t/>
-            </a:r>
-          </a:p>
-        </p:txBody>
-      </p:sp>
-      <p:sp>
-        <p:nvSpPr>
-          <p:cNvPr id="5" name="TextBox 4"/>
-          <p:cNvSpPr txBox="1"/>
-          <p:nvPr/>
-        </p:nvSpPr>
-        <p:spPr>
-          <a:xfrm>
-            <a:off x="594360" y="3529584"/>
-            <a:ext cx="11002975" cy="685800"/>
-          </a:xfrm>
-          <a:prstGeom prst="rect">
-            <a:avLst/>
-          </a:prstGeom>
-          <a:noFill/>
-        </p:spPr>
-        <p:txBody>
-          <a:bodyPr wrap="square">
-            <a:spAutoFit/>
-          </a:bodyPr>
-          <a:lstStyle/>
-          <a:p>
-            <a:pPr algn="ctr"/>
-            <a:r>
-              <a:rPr sz="4400" b="1" i="0">
-                <a:solidFill>
-                  <a:srgbClr val="FFFFFF"/>
-                </a:solidFill>
-                <a:latin typeface="Arial"/>
-              </a:rPr>
-              <a:t>大水の中にも　          望みは絶えない</a:t>
-            </a:r>
-          </a:p>
-        </p:txBody>
-      </p:sp>
-      <p:sp>
-        <p:nvSpPr>
-          <p:cNvPr id="6" name="TextBox 5"/>
-          <p:cNvSpPr txBox="1"/>
-          <p:nvPr/>
-        </p:nvSpPr>
-        <p:spPr>
-          <a:xfrm>
-            <a:off x="594360" y="4251960"/>
-            <a:ext cx="11002975" cy="384048"/>
-          </a:xfrm>
-          <a:prstGeom prst="rect">
-            <a:avLst/>
-          </a:prstGeom>
-          <a:noFill/>
-        </p:spPr>
-        <p:txBody>
-          <a:bodyPr wrap="square">
-            <a:spAutoFit/>
-          </a:bodyPr>
-          <a:lstStyle/>
-          <a:p>
-            <a:pPr algn="ctr"/>
-            <a:r>
-              <a:rPr sz="2400" b="0" i="1">
-                <a:solidFill>
-                  <a:srgbClr val="B4B4B4"/>
-                </a:solidFill>
-                <a:latin typeface="Arial"/>
-              </a:rPr>
-              <a:t>oomizu no naka ni mo  nozomi wa taenai</a:t>
+                  <a:srgbClr val="828282"/>
+                </a:solidFill>
+                <a:latin typeface="Arial"/>
+              </a:rPr>
+              <a:t>Todo outro chão é areia movediça</a:t>
             </a:r>
           </a:p>
         </p:txBody>
@@ -6468,8 +6188,8 @@
         </p:nvSpPr>
         <p:spPr>
           <a:xfrm>
-            <a:off x="594360" y="4672584"/>
-            <a:ext cx="11002975" cy="347472"/>
+            <a:off x="640080" y="4896612"/>
+            <a:ext cx="10911535" cy="310896"/>
           </a:xfrm>
           <a:prstGeom prst="rect">
             <a:avLst/>
@@ -6486,11 +6206,11 @@
             <a:r>
               <a:rPr sz="2000" b="0" i="1">
                 <a:solidFill>
-                  <a:srgbClr val="8C8C8C"/>
-                </a:solidFill>
-                <a:latin typeface="Arial"/>
-              </a:rPr>
-              <a:t/>
+                  <a:srgbClr val="828282"/>
+                </a:solidFill>
+                <a:latin typeface="Arial"/>
+              </a:rPr>
+              <a:t>Quando as trevas parecem ocultar Seu rosto</a:t>
             </a:r>
           </a:p>
         </p:txBody>

--- a/output_pptx/The_Solid_Rock.pptx
+++ b/output_pptx/The_Solid_Rock.pptx
@@ -3751,6 +3751,76 @@
           </a:p>
         </p:txBody>
       </p:sp>
+      <p:sp>
+        <p:nvSpPr>
+          <p:cNvPr id="4" name="TextBox 3"/>
+          <p:cNvSpPr txBox="1"/>
+          <p:nvPr/>
+        </p:nvSpPr>
+        <p:spPr>
+          <a:xfrm>
+            <a:off x="640080" y="4128516"/>
+            <a:ext cx="10911535" cy="310896"/>
+          </a:xfrm>
+          <a:prstGeom prst="rect">
+            <a:avLst/>
+          </a:prstGeom>
+          <a:noFill/>
+        </p:spPr>
+        <p:txBody>
+          <a:bodyPr wrap="square">
+            <a:spAutoFit/>
+          </a:bodyPr>
+          <a:lstStyle/>
+          <a:p>
+            <a:pPr algn="ctr"/>
+            <a:r>
+              <a:rPr sz="2000" b="0" i="0">
+                <a:solidFill>
+                  <a:srgbClr val="828282"/>
+                </a:solidFill>
+                <a:latin typeface="Arial"/>
+              </a:rPr>
+              <a:t>わたしは変わらない主の恵みに支えられています</a:t>
+            </a:r>
+          </a:p>
+        </p:txBody>
+      </p:sp>
+      <p:sp>
+        <p:nvSpPr>
+          <p:cNvPr id="5" name="TextBox 4"/>
+          <p:cNvSpPr txBox="1"/>
+          <p:nvPr/>
+        </p:nvSpPr>
+        <p:spPr>
+          <a:xfrm>
+            <a:off x="640080" y="4494276"/>
+            <a:ext cx="10911535" cy="310896"/>
+          </a:xfrm>
+          <a:prstGeom prst="rect">
+            <a:avLst/>
+          </a:prstGeom>
+          <a:noFill/>
+        </p:spPr>
+        <p:txBody>
+          <a:bodyPr wrap="square">
+            <a:spAutoFit/>
+          </a:bodyPr>
+          <a:lstStyle/>
+          <a:p>
+            <a:pPr algn="ctr"/>
+            <a:r>
+              <a:rPr sz="2000" b="0" i="0">
+                <a:solidFill>
+                  <a:srgbClr val="828282"/>
+                </a:solidFill>
+                <a:latin typeface="Arial"/>
+              </a:rPr>
+              <a:t>最も激しい嵐の中で</a:t>
+            </a:r>
+          </a:p>
+        </p:txBody>
+      </p:sp>
     </p:spTree>
   </p:cSld>
   <p:clrMapOvr>
@@ -3847,6 +3917,76 @@
           </a:p>
         </p:txBody>
       </p:sp>
+      <p:sp>
+        <p:nvSpPr>
+          <p:cNvPr id="4" name="TextBox 3"/>
+          <p:cNvSpPr txBox="1"/>
+          <p:nvPr/>
+        </p:nvSpPr>
+        <p:spPr>
+          <a:xfrm>
+            <a:off x="640080" y="4128516"/>
+            <a:ext cx="10911535" cy="310896"/>
+          </a:xfrm>
+          <a:prstGeom prst="rect">
+            <a:avLst/>
+          </a:prstGeom>
+          <a:noFill/>
+        </p:spPr>
+        <p:txBody>
+          <a:bodyPr wrap="square">
+            <a:spAutoFit/>
+          </a:bodyPr>
+          <a:lstStyle/>
+          <a:p>
+            <a:pPr algn="ctr"/>
+            <a:r>
+              <a:rPr sz="2000" b="0" i="0">
+                <a:solidFill>
+                  <a:srgbClr val="828282"/>
+                </a:solidFill>
+                <a:latin typeface="Arial"/>
+              </a:rPr>
+              <a:t>わたしの確かな錨は幕の向こうにあります</a:t>
+            </a:r>
+          </a:p>
+        </p:txBody>
+      </p:sp>
+      <p:sp>
+        <p:nvSpPr>
+          <p:cNvPr id="5" name="TextBox 4"/>
+          <p:cNvSpPr txBox="1"/>
+          <p:nvPr/>
+        </p:nvSpPr>
+        <p:spPr>
+          <a:xfrm>
+            <a:off x="640080" y="4494276"/>
+            <a:ext cx="10911535" cy="310896"/>
+          </a:xfrm>
+          <a:prstGeom prst="rect">
+            <a:avLst/>
+          </a:prstGeom>
+          <a:noFill/>
+        </p:spPr>
+        <p:txBody>
+          <a:bodyPr wrap="square">
+            <a:spAutoFit/>
+          </a:bodyPr>
+          <a:lstStyle/>
+          <a:p>
+            <a:pPr algn="ctr"/>
+            <a:r>
+              <a:rPr sz="2000" b="0" i="0">
+                <a:solidFill>
+                  <a:srgbClr val="828282"/>
+                </a:solidFill>
+                <a:latin typeface="Arial"/>
+              </a:rPr>
+              <a:t>キリストの中に、堅い岩の上に、わたしはいます</a:t>
+            </a:r>
+          </a:p>
+        </p:txBody>
+      </p:sp>
     </p:spTree>
   </p:cSld>
   <p:clrMapOvr>
@@ -3943,6 +4083,76 @@
           </a:p>
         </p:txBody>
       </p:sp>
+      <p:sp>
+        <p:nvSpPr>
+          <p:cNvPr id="4" name="TextBox 3"/>
+          <p:cNvSpPr txBox="1"/>
+          <p:nvPr/>
+        </p:nvSpPr>
+        <p:spPr>
+          <a:xfrm>
+            <a:off x="640080" y="4128516"/>
+            <a:ext cx="10911535" cy="310896"/>
+          </a:xfrm>
+          <a:prstGeom prst="rect">
+            <a:avLst/>
+          </a:prstGeom>
+          <a:noFill/>
+        </p:spPr>
+        <p:txBody>
+          <a:bodyPr wrap="square">
+            <a:spAutoFit/>
+          </a:bodyPr>
+          <a:lstStyle/>
+          <a:p>
+            <a:pPr algn="ctr"/>
+            <a:r>
+              <a:rPr sz="2000" b="0" i="0">
+                <a:solidFill>
+                  <a:srgbClr val="828282"/>
+                </a:solidFill>
+                <a:latin typeface="Arial"/>
+              </a:rPr>
+              <a:t>すべての他の地は流砂です</a:t>
+            </a:r>
+          </a:p>
+        </p:txBody>
+      </p:sp>
+      <p:sp>
+        <p:nvSpPr>
+          <p:cNvPr id="5" name="TextBox 4"/>
+          <p:cNvSpPr txBox="1"/>
+          <p:nvPr/>
+        </p:nvSpPr>
+        <p:spPr>
+          <a:xfrm>
+            <a:off x="640080" y="4494276"/>
+            <a:ext cx="10911535" cy="310896"/>
+          </a:xfrm>
+          <a:prstGeom prst="rect">
+            <a:avLst/>
+          </a:prstGeom>
+          <a:noFill/>
+        </p:spPr>
+        <p:txBody>
+          <a:bodyPr wrap="square">
+            <a:spAutoFit/>
+          </a:bodyPr>
+          <a:lstStyle/>
+          <a:p>
+            <a:pPr algn="ctr"/>
+            <a:r>
+              <a:rPr sz="2000" b="0" i="0">
+                <a:solidFill>
+                  <a:srgbClr val="828282"/>
+                </a:solidFill>
+                <a:latin typeface="Arial"/>
+              </a:rPr>
+              <a:t>すべての他の地は流砂です</a:t>
+            </a:r>
+          </a:p>
+        </p:txBody>
+      </p:sp>
     </p:spTree>
   </p:cSld>
   <p:clrMapOvr>
@@ -5267,6 +5477,76 @@
                 <a:latin typeface="Arial"/>
               </a:rPr>
               <a:t>Todo outro chão é areia movediça</a:t>
+            </a:r>
+          </a:p>
+        </p:txBody>
+      </p:sp>
+      <p:sp>
+        <p:nvSpPr>
+          <p:cNvPr id="4" name="TextBox 3"/>
+          <p:cNvSpPr txBox="1"/>
+          <p:nvPr/>
+        </p:nvSpPr>
+        <p:spPr>
+          <a:xfrm>
+            <a:off x="640080" y="4128516"/>
+            <a:ext cx="10911535" cy="310896"/>
+          </a:xfrm>
+          <a:prstGeom prst="rect">
+            <a:avLst/>
+          </a:prstGeom>
+          <a:noFill/>
+        </p:spPr>
+        <p:txBody>
+          <a:bodyPr wrap="square">
+            <a:spAutoFit/>
+          </a:bodyPr>
+          <a:lstStyle/>
+          <a:p>
+            <a:pPr algn="ctr"/>
+            <a:r>
+              <a:rPr sz="2000" b="0" i="0">
+                <a:solidFill>
+                  <a:srgbClr val="828282"/>
+                </a:solidFill>
+                <a:latin typeface="Arial"/>
+              </a:rPr>
+              <a:t>キリストの中に、堅い岩の上に、わたしはいます</a:t>
+            </a:r>
+          </a:p>
+        </p:txBody>
+      </p:sp>
+      <p:sp>
+        <p:nvSpPr>
+          <p:cNvPr id="5" name="TextBox 4"/>
+          <p:cNvSpPr txBox="1"/>
+          <p:nvPr/>
+        </p:nvSpPr>
+        <p:spPr>
+          <a:xfrm>
+            <a:off x="640080" y="4494276"/>
+            <a:ext cx="10911535" cy="310896"/>
+          </a:xfrm>
+          <a:prstGeom prst="rect">
+            <a:avLst/>
+          </a:prstGeom>
+          <a:noFill/>
+        </p:spPr>
+        <p:txBody>
+          <a:bodyPr wrap="square">
+            <a:spAutoFit/>
+          </a:bodyPr>
+          <a:lstStyle/>
+          <a:p>
+            <a:pPr algn="ctr"/>
+            <a:r>
+              <a:rPr sz="2000" b="0" i="0">
+                <a:solidFill>
+                  <a:srgbClr val="828282"/>
+                </a:solidFill>
+                <a:latin typeface="Arial"/>
+              </a:rPr>
+              <a:t>すべての他の地は流砂です</a:t>
             </a:r>
           </a:p>
         </p:txBody>
